--- a/Docs/taxotox_flowchart.pptx
+++ b/Docs/taxotox_flowchart.pptx
@@ -302,7 +302,7 @@
           <a:p>
             <a:fld id="{5BCAD085-E8A6-8845-BD4E-CB4CCA059FC4}" type="datetimeFigureOut">
               <a:rPr lang="en-US" smtClean="0"/>
-              <a:t>3/21/2026</a:t>
+              <a:t>5/24/2026</a:t>
             </a:fld>
             <a:endParaRPr lang="en-US"/>
           </a:p>
@@ -470,7 +470,7 @@
           <a:p>
             <a:fld id="{5BCAD085-E8A6-8845-BD4E-CB4CCA059FC4}" type="datetimeFigureOut">
               <a:rPr lang="en-US" smtClean="0"/>
-              <a:t>3/21/2026</a:t>
+              <a:t>5/24/2026</a:t>
             </a:fld>
             <a:endParaRPr lang="en-US"/>
           </a:p>
@@ -648,7 +648,7 @@
           <a:p>
             <a:fld id="{5BCAD085-E8A6-8845-BD4E-CB4CCA059FC4}" type="datetimeFigureOut">
               <a:rPr lang="en-US" smtClean="0"/>
-              <a:t>3/21/2026</a:t>
+              <a:t>5/24/2026</a:t>
             </a:fld>
             <a:endParaRPr lang="en-US"/>
           </a:p>
@@ -816,7 +816,7 @@
           <a:p>
             <a:fld id="{5BCAD085-E8A6-8845-BD4E-CB4CCA059FC4}" type="datetimeFigureOut">
               <a:rPr lang="en-US" smtClean="0"/>
-              <a:t>3/21/2026</a:t>
+              <a:t>5/24/2026</a:t>
             </a:fld>
             <a:endParaRPr lang="en-US"/>
           </a:p>
@@ -1061,7 +1061,7 @@
           <a:p>
             <a:fld id="{5BCAD085-E8A6-8845-BD4E-CB4CCA059FC4}" type="datetimeFigureOut">
               <a:rPr lang="en-US" smtClean="0"/>
-              <a:t>3/21/2026</a:t>
+              <a:t>5/24/2026</a:t>
             </a:fld>
             <a:endParaRPr lang="en-US"/>
           </a:p>
@@ -1346,7 +1346,7 @@
           <a:p>
             <a:fld id="{5BCAD085-E8A6-8845-BD4E-CB4CCA059FC4}" type="datetimeFigureOut">
               <a:rPr lang="en-US" smtClean="0"/>
-              <a:t>3/21/2026</a:t>
+              <a:t>5/24/2026</a:t>
             </a:fld>
             <a:endParaRPr lang="en-US"/>
           </a:p>
@@ -1765,7 +1765,7 @@
           <a:p>
             <a:fld id="{5BCAD085-E8A6-8845-BD4E-CB4CCA059FC4}" type="datetimeFigureOut">
               <a:rPr lang="en-US" smtClean="0"/>
-              <a:t>3/21/2026</a:t>
+              <a:t>5/24/2026</a:t>
             </a:fld>
             <a:endParaRPr lang="en-US"/>
           </a:p>
@@ -1882,7 +1882,7 @@
           <a:p>
             <a:fld id="{5BCAD085-E8A6-8845-BD4E-CB4CCA059FC4}" type="datetimeFigureOut">
               <a:rPr lang="en-US" smtClean="0"/>
-              <a:t>3/21/2026</a:t>
+              <a:t>5/24/2026</a:t>
             </a:fld>
             <a:endParaRPr lang="en-US"/>
           </a:p>
@@ -1977,7 +1977,7 @@
           <a:p>
             <a:fld id="{5BCAD085-E8A6-8845-BD4E-CB4CCA059FC4}" type="datetimeFigureOut">
               <a:rPr lang="en-US" smtClean="0"/>
-              <a:t>3/21/2026</a:t>
+              <a:t>5/24/2026</a:t>
             </a:fld>
             <a:endParaRPr lang="en-US"/>
           </a:p>
@@ -2252,7 +2252,7 @@
           <a:p>
             <a:fld id="{5BCAD085-E8A6-8845-BD4E-CB4CCA059FC4}" type="datetimeFigureOut">
               <a:rPr lang="en-US" smtClean="0"/>
-              <a:t>3/21/2026</a:t>
+              <a:t>5/24/2026</a:t>
             </a:fld>
             <a:endParaRPr lang="en-US"/>
           </a:p>
@@ -2504,7 +2504,7 @@
           <a:p>
             <a:fld id="{5BCAD085-E8A6-8845-BD4E-CB4CCA059FC4}" type="datetimeFigureOut">
               <a:rPr lang="en-US" smtClean="0"/>
-              <a:t>3/21/2026</a:t>
+              <a:t>5/24/2026</a:t>
             </a:fld>
             <a:endParaRPr lang="en-US"/>
           </a:p>
@@ -2715,7 +2715,7 @@
           <a:p>
             <a:fld id="{5BCAD085-E8A6-8845-BD4E-CB4CCA059FC4}" type="datetimeFigureOut">
               <a:rPr lang="en-US" smtClean="0"/>
-              <a:t>3/21/2026</a:t>
+              <a:t>5/24/2026</a:t>
             </a:fld>
             <a:endParaRPr lang="en-US"/>
           </a:p>
@@ -3173,8 +3173,8 @@
         </p:nvSpPr>
         <p:spPr>
           <a:xfrm>
-            <a:off x="345600" y="1160089"/>
-            <a:ext cx="1684800" cy="4973400"/>
+            <a:off x="345599" y="1152469"/>
+            <a:ext cx="4076480" cy="5040000"/>
           </a:xfrm>
           <a:prstGeom prst="rect">
             <a:avLst/>
@@ -3220,8 +3220,8 @@
         </p:nvSpPr>
         <p:spPr>
           <a:xfrm>
-            <a:off x="2871256" y="1188000"/>
-            <a:ext cx="3823457" cy="4892400"/>
+            <a:off x="4791496" y="1134660"/>
+            <a:ext cx="3823457" cy="5040000"/>
           </a:xfrm>
           <a:prstGeom prst="rect">
             <a:avLst/>
@@ -3267,8 +3267,8 @@
         </p:nvSpPr>
         <p:spPr>
           <a:xfrm>
-            <a:off x="1512000" y="6782154"/>
-            <a:ext cx="4860000" cy="2004605"/>
+            <a:off x="5337788" y="6942174"/>
+            <a:ext cx="3327831" cy="2004605"/>
           </a:xfrm>
           <a:prstGeom prst="rect">
             <a:avLst/>
@@ -3315,8 +3315,8 @@
         </p:nvSpPr>
         <p:spPr>
           <a:xfrm>
-            <a:off x="1576800" y="7020000"/>
-            <a:ext cx="1490400" cy="1668599"/>
+            <a:off x="5404209" y="7185418"/>
+            <a:ext cx="1008000" cy="1668599"/>
           </a:xfrm>
           <a:prstGeom prst="rect">
             <a:avLst/>
@@ -3362,8 +3362,8 @@
         </p:nvSpPr>
         <p:spPr>
           <a:xfrm>
-            <a:off x="3196799" y="7020000"/>
-            <a:ext cx="1490400" cy="1668599"/>
+            <a:off x="6483188" y="7185418"/>
+            <a:ext cx="1008000" cy="1668599"/>
           </a:xfrm>
           <a:prstGeom prst="rect">
             <a:avLst/>
@@ -3409,8 +3409,8 @@
         </p:nvSpPr>
         <p:spPr>
           <a:xfrm>
-            <a:off x="4816800" y="7020000"/>
-            <a:ext cx="1490400" cy="1668599"/>
+            <a:off x="7585029" y="7185418"/>
+            <a:ext cx="1008000" cy="1668599"/>
           </a:xfrm>
           <a:prstGeom prst="rect">
             <a:avLst/>
@@ -3456,8 +3456,8 @@
         </p:nvSpPr>
         <p:spPr>
           <a:xfrm>
-            <a:off x="1382400" y="8959259"/>
-            <a:ext cx="5248800" cy="939600"/>
+            <a:off x="3508988" y="9119278"/>
+            <a:ext cx="3327831" cy="1143889"/>
           </a:xfrm>
           <a:prstGeom prst="rect">
             <a:avLst/>
@@ -3503,8 +3503,8 @@
         </p:nvSpPr>
         <p:spPr>
           <a:xfrm>
-            <a:off x="361799" y="1224060"/>
-            <a:ext cx="1654200" cy="369332"/>
+            <a:off x="361798" y="1224060"/>
+            <a:ext cx="3071401" cy="230832"/>
           </a:xfrm>
           <a:prstGeom prst="rect">
             <a:avLst/>
@@ -3522,15 +3522,20 @@
           <a:p>
             <a:pPr algn="ctr"/>
             <a:r>
-              <a:rPr sz="900" b="1" dirty="0">
+              <a:rPr lang="en-US" sz="900" b="1" dirty="0">
                 <a:solidFill>
                   <a:srgbClr val="5B82B9"/>
                 </a:solidFill>
                 <a:latin typeface="Calibri"/>
               </a:rPr>
-              <a:t>OFFLINE PREPARATION PHASE
-(run once, refresh quarterly)</a:t>
-            </a:r>
+              <a:t>Installation and upgrade (run once, refresh quarterly)</a:t>
+            </a:r>
+            <a:endParaRPr sz="900" b="1" dirty="0">
+              <a:solidFill>
+                <a:srgbClr val="5B82B9"/>
+              </a:solidFill>
+              <a:latin typeface="Calibri"/>
+            </a:endParaRPr>
           </a:p>
         </p:txBody>
       </p:sp>
@@ -3542,7 +3547,7 @@
         </p:nvSpPr>
         <p:spPr>
           <a:xfrm>
-            <a:off x="3959900" y="1186533"/>
+            <a:off x="5864900" y="1133193"/>
             <a:ext cx="3223800" cy="230832"/>
           </a:xfrm>
           <a:prstGeom prst="rect">
@@ -3580,8 +3585,8 @@
         </p:nvSpPr>
         <p:spPr>
           <a:xfrm>
-            <a:off x="1452000" y="6786659"/>
-            <a:ext cx="2068195" cy="230832"/>
+            <a:off x="5955420" y="6932813"/>
+            <a:ext cx="2079900" cy="230832"/>
           </a:xfrm>
           <a:prstGeom prst="rect">
             <a:avLst/>
@@ -3592,7 +3597,7 @@
           </a:ln>
         </p:spPr>
         <p:txBody>
-          <a:bodyPr wrap="none">
+          <a:bodyPr wrap="square">
             <a:spAutoFit/>
           </a:bodyPr>
           <a:lstStyle/>
@@ -3618,7 +3623,7 @@
         </p:nvSpPr>
         <p:spPr>
           <a:xfrm>
-            <a:off x="1398600" y="9022320"/>
+            <a:off x="4723893" y="9119279"/>
             <a:ext cx="915635" cy="230832"/>
           </a:xfrm>
           <a:prstGeom prst="rect">
@@ -3637,7 +3642,7 @@
           <a:p>
             <a:pPr algn="l"/>
             <a:r>
-              <a:rPr sz="900" b="1">
+              <a:rPr sz="900" b="1" dirty="0">
                 <a:solidFill>
                   <a:srgbClr val="C83C3C"/>
                 </a:solidFill>
@@ -3698,13 +3703,31 @@
               </a:spcAft>
             </a:pPr>
             <a:r>
-              <a:rPr sz="900" b="1" i="0">
-                <a:solidFill>
-                  <a:srgbClr val="000000"/>
-                </a:solidFill>
-                <a:latin typeface="Calibri"/>
-              </a:rPr>
-              <a:t>Use ecotoxR to update</a:t>
+              <a:rPr sz="900" b="1" i="0" dirty="0">
+                <a:solidFill>
+                  <a:srgbClr val="000000"/>
+                </a:solidFill>
+                <a:latin typeface="Calibri"/>
+              </a:rPr>
+              <a:t>Use </a:t>
+            </a:r>
+            <a:r>
+              <a:rPr sz="900" b="1" i="0" dirty="0" err="1">
+                <a:solidFill>
+                  <a:srgbClr val="000000"/>
+                </a:solidFill>
+                <a:latin typeface="Calibri"/>
+              </a:rPr>
+              <a:t>ecotoxR</a:t>
+            </a:r>
+            <a:r>
+              <a:rPr sz="900" b="1" i="0" dirty="0">
+                <a:solidFill>
+                  <a:srgbClr val="000000"/>
+                </a:solidFill>
+                <a:latin typeface="Calibri"/>
+              </a:rPr>
+              <a:t> to update</a:t>
             </a:r>
           </a:p>
           <a:p>
@@ -3717,7 +3740,7 @@
               </a:spcAft>
             </a:pPr>
             <a:r>
-              <a:rPr sz="900" b="0" i="0">
+              <a:rPr sz="900" b="0" i="0" dirty="0">
                 <a:solidFill>
                   <a:srgbClr val="000000"/>
                 </a:solidFill>
@@ -3736,8 +3759,8 @@
         </p:nvSpPr>
         <p:spPr>
           <a:xfrm>
-            <a:off x="539999" y="2286719"/>
-            <a:ext cx="1296000" cy="684000"/>
+            <a:off x="395999" y="2286719"/>
+            <a:ext cx="1584000" cy="684000"/>
           </a:xfrm>
           <a:prstGeom prst="can">
             <a:avLst/>
@@ -3778,14 +3801,38 @@
               </a:spcAft>
             </a:pPr>
             <a:r>
-              <a:rPr sz="900" b="1" i="0">
-                <a:solidFill>
-                  <a:srgbClr val="000000"/>
-                </a:solidFill>
-                <a:latin typeface="Calibri"/>
-              </a:rPr>
-              <a:t>ECOTOX SQLite</a:t>
-            </a:r>
+              <a:rPr lang="en-US" sz="900" b="0" i="0" dirty="0" err="1">
+                <a:solidFill>
+                  <a:srgbClr val="000000"/>
+                </a:solidFill>
+                <a:latin typeface="Calibri"/>
+              </a:rPr>
+              <a:t>Ecotox</a:t>
+            </a:r>
+            <a:r>
+              <a:rPr lang="en-US" sz="900" b="0" i="0" dirty="0">
+                <a:solidFill>
+                  <a:srgbClr val="000000"/>
+                </a:solidFill>
+                <a:latin typeface="Calibri"/>
+              </a:rPr>
+              <a:t> </a:t>
+            </a:r>
+            <a:r>
+              <a:rPr lang="en-US" sz="900" dirty="0" err="1">
+                <a:solidFill>
+                  <a:srgbClr val="000000"/>
+                </a:solidFill>
+                <a:latin typeface="Calibri"/>
+              </a:rPr>
+              <a:t>Sqlite</a:t>
+            </a:r>
+            <a:endParaRPr sz="900" b="0" i="0" dirty="0">
+              <a:solidFill>
+                <a:srgbClr val="000000"/>
+              </a:solidFill>
+              <a:latin typeface="Calibri"/>
+            </a:endParaRPr>
           </a:p>
           <a:p>
             <a:pPr algn="ctr">
@@ -3797,26 +3844,7 @@
               </a:spcAft>
             </a:pPr>
             <a:r>
-              <a:rPr sz="900" b="0" i="0">
-                <a:solidFill>
-                  <a:srgbClr val="000000"/>
-                </a:solidFill>
-                <a:latin typeface="Calibri"/>
-              </a:rPr>
-              <a:t>EPA Aquatic</a:t>
-            </a:r>
-          </a:p>
-          <a:p>
-            <a:pPr algn="ctr">
-              <a:spcBef>
-                <a:spcPts val="0"/>
-              </a:spcBef>
-              <a:spcAft>
-                <a:spcPts val="0"/>
-              </a:spcAft>
-            </a:pPr>
-            <a:r>
-              <a:rPr sz="900" b="0" i="0">
+              <a:rPr sz="900" b="0" i="0" dirty="0">
                 <a:solidFill>
                   <a:srgbClr val="000000"/>
                 </a:solidFill>
@@ -3824,6 +3852,39 @@
               </a:rPr>
               <a:t>LC₅₀ / EC₅₀</a:t>
             </a:r>
+            <a:r>
+              <a:rPr lang="en-US" sz="900" b="0" i="0" dirty="0">
+                <a:solidFill>
+                  <a:srgbClr val="000000"/>
+                </a:solidFill>
+                <a:latin typeface="Calibri"/>
+              </a:rPr>
+              <a:t> + EC</a:t>
+            </a:r>
+            <a:r>
+              <a:rPr lang="en-US" sz="900" b="0" i="0" baseline="-25000" dirty="0">
+                <a:solidFill>
+                  <a:srgbClr val="000000"/>
+                </a:solidFill>
+                <a:latin typeface="Calibri"/>
+              </a:rPr>
+              <a:t>5</a:t>
+            </a:r>
+            <a:r>
+              <a:rPr lang="en-US" sz="900" b="0" i="0" dirty="0">
+                <a:solidFill>
+                  <a:srgbClr val="000000"/>
+                </a:solidFill>
+                <a:latin typeface="Calibri"/>
+              </a:rPr>
+              <a:t> + API</a:t>
+            </a:r>
+            <a:endParaRPr sz="900" b="0" i="0" baseline="-25000" dirty="0">
+              <a:solidFill>
+                <a:srgbClr val="000000"/>
+              </a:solidFill>
+              <a:latin typeface="Calibri"/>
+            </a:endParaRPr>
           </a:p>
         </p:txBody>
       </p:sp>
@@ -3835,7 +3896,7 @@
         </p:nvSpPr>
         <p:spPr>
           <a:xfrm>
-            <a:off x="395999" y="3172319"/>
+            <a:off x="395999" y="3126599"/>
             <a:ext cx="1584000" cy="468000"/>
           </a:xfrm>
           <a:prstGeom prst="roundRect">
@@ -3877,13 +3938,13 @@
               </a:spcAft>
             </a:pPr>
             <a:r>
-              <a:rPr sz="900" b="1" i="0">
-                <a:solidFill>
-                  <a:srgbClr val="000000"/>
-                </a:solidFill>
-                <a:latin typeface="Calibri"/>
-              </a:rPr>
-              <a:t>taxotox_install.R</a:t>
+              <a:rPr sz="900" b="0" i="0" dirty="0">
+                <a:solidFill>
+                  <a:srgbClr val="000000"/>
+                </a:solidFill>
+                <a:latin typeface="Calibri"/>
+              </a:rPr>
+              <a:t>SQL extraction</a:t>
             </a:r>
           </a:p>
           <a:p>
@@ -3896,26 +3957,7 @@
               </a:spcAft>
             </a:pPr>
             <a:r>
-              <a:rPr sz="900" b="0" i="0">
-                <a:solidFill>
-                  <a:srgbClr val="000000"/>
-                </a:solidFill>
-                <a:latin typeface="Calibri"/>
-              </a:rPr>
-              <a:t>SQL extraction</a:t>
-            </a:r>
-          </a:p>
-          <a:p>
-            <a:pPr algn="ctr">
-              <a:spcBef>
-                <a:spcPts val="0"/>
-              </a:spcBef>
-              <a:spcAft>
-                <a:spcPts val="0"/>
-              </a:spcAft>
-            </a:pPr>
-            <a:r>
-              <a:rPr sz="900" b="0" i="0">
+              <a:rPr sz="900" b="0" i="0" dirty="0">
                 <a:solidFill>
                   <a:srgbClr val="000000"/>
                 </a:solidFill>
@@ -3935,7 +3977,7 @@
         <p:spPr>
           <a:xfrm>
             <a:off x="360000" y="3748320"/>
-            <a:ext cx="1655999" cy="936000"/>
+            <a:ext cx="1655999" cy="695465"/>
           </a:xfrm>
           <a:prstGeom prst="roundRect">
             <a:avLst/>
@@ -3976,14 +4018,29 @@
               </a:spcAft>
             </a:pPr>
             <a:r>
-              <a:rPr sz="900" b="1" i="0">
-                <a:solidFill>
-                  <a:srgbClr val="000000"/>
-                </a:solidFill>
-                <a:latin typeface="Calibri"/>
-              </a:rPr>
-              <a:t>Unit Normalisation</a:t>
-            </a:r>
+              <a:rPr sz="900" b="1" i="0" dirty="0">
+                <a:solidFill>
+                  <a:srgbClr val="000000"/>
+                </a:solidFill>
+                <a:latin typeface="Calibri"/>
+              </a:rPr>
+              <a:t>Unit </a:t>
+            </a:r>
+            <a:r>
+              <a:rPr sz="900" b="1" i="0" dirty="0" err="1">
+                <a:solidFill>
+                  <a:srgbClr val="000000"/>
+                </a:solidFill>
+                <a:latin typeface="Calibri"/>
+              </a:rPr>
+              <a:t>Normalisation</a:t>
+            </a:r>
+            <a:endParaRPr sz="900" b="1" i="0" dirty="0">
+              <a:solidFill>
+                <a:srgbClr val="000000"/>
+              </a:solidFill>
+              <a:latin typeface="Calibri"/>
+            </a:endParaRPr>
           </a:p>
           <a:p>
             <a:pPr algn="ctr">
@@ -3995,13 +4052,31 @@
               </a:spcAft>
             </a:pPr>
             <a:r>
-              <a:rPr sz="900" b="0" i="0">
-                <a:solidFill>
-                  <a:srgbClr val="000000"/>
-                </a:solidFill>
-                <a:latin typeface="Calibri"/>
-              </a:rPr>
-              <a:t>ng L⁻¹   μg L⁻¹   mg L⁻¹</a:t>
+              <a:rPr sz="900" b="0" i="0" dirty="0">
+                <a:solidFill>
+                  <a:srgbClr val="000000"/>
+                </a:solidFill>
+                <a:latin typeface="Calibri"/>
+              </a:rPr>
+              <a:t>ng L⁻¹   </a:t>
+            </a:r>
+            <a:r>
+              <a:rPr sz="900" b="0" i="0" dirty="0" err="1">
+                <a:solidFill>
+                  <a:srgbClr val="000000"/>
+                </a:solidFill>
+                <a:latin typeface="Calibri"/>
+              </a:rPr>
+              <a:t>μg</a:t>
+            </a:r>
+            <a:r>
+              <a:rPr sz="900" b="0" i="0" dirty="0">
+                <a:solidFill>
+                  <a:srgbClr val="000000"/>
+                </a:solidFill>
+                <a:latin typeface="Calibri"/>
+              </a:rPr>
+              <a:t> L⁻¹   mg L⁻¹</a:t>
             </a:r>
           </a:p>
           <a:p>
@@ -4014,7 +4089,7 @@
               </a:spcAft>
             </a:pPr>
             <a:r>
-              <a:rPr sz="900" b="0" i="0">
+              <a:rPr sz="900" b="0" i="0" dirty="0">
                 <a:solidFill>
                   <a:srgbClr val="000000"/>
                 </a:solidFill>
@@ -4033,7 +4108,7 @@
               </a:spcAft>
             </a:pPr>
             <a:r>
-              <a:rPr sz="900" b="0" i="0">
+              <a:rPr sz="900" b="0" i="0" dirty="0">
                 <a:solidFill>
                   <a:srgbClr val="000000"/>
                 </a:solidFill>
@@ -4052,7 +4127,7 @@
               </a:spcAft>
             </a:pPr>
             <a:r>
-              <a:rPr sz="900" b="0" i="1">
+              <a:rPr sz="900" b="0" i="1" dirty="0">
                 <a:solidFill>
                   <a:srgbClr val="000000"/>
                 </a:solidFill>
@@ -4071,8 +4146,8 @@
         </p:nvSpPr>
         <p:spPr>
           <a:xfrm>
-            <a:off x="395999" y="4844670"/>
-            <a:ext cx="1584000" cy="432000"/>
+            <a:off x="395999" y="4603811"/>
+            <a:ext cx="1584000" cy="627139"/>
           </a:xfrm>
           <a:prstGeom prst="roundRect">
             <a:avLst/>
@@ -4113,7 +4188,7 @@
               </a:spcAft>
             </a:pPr>
             <a:r>
-              <a:rPr sz="900" b="1" i="0">
+              <a:rPr sz="900" b="1" i="0" dirty="0">
                 <a:solidFill>
                   <a:srgbClr val="000000"/>
                 </a:solidFill>
@@ -4121,18 +4196,35 @@
               </a:rPr>
               <a:t>Calculate Medians</a:t>
             </a:r>
-          </a:p>
-          <a:p>
-            <a:pPr algn="ctr">
-              <a:spcBef>
-                <a:spcPts val="0"/>
-              </a:spcBef>
-              <a:spcAft>
-                <a:spcPts val="0"/>
-              </a:spcAft>
-            </a:pPr>
-            <a:r>
-              <a:rPr sz="900" b="0" i="0">
+            <a:r>
+              <a:rPr lang="en-US" sz="900" b="1" i="0" dirty="0">
+                <a:solidFill>
+                  <a:srgbClr val="000000"/>
+                </a:solidFill>
+                <a:latin typeface="Calibri"/>
+              </a:rPr>
+              <a:t> and HC</a:t>
+            </a:r>
+            <a:r>
+              <a:rPr lang="en-US" sz="900" b="1" baseline="-25000" dirty="0">
+                <a:solidFill>
+                  <a:srgbClr val="000000"/>
+                </a:solidFill>
+                <a:latin typeface="Calibri"/>
+              </a:rPr>
+              <a:t>5</a:t>
+            </a:r>
+            <a:endParaRPr sz="900" b="1" i="0" dirty="0">
+              <a:solidFill>
+                <a:srgbClr val="000000"/>
+              </a:solidFill>
+              <a:latin typeface="Calibri"/>
+            </a:endParaRPr>
+          </a:p>
+          <a:p>
+            <a:pPr algn="ctr"/>
+            <a:r>
+              <a:rPr sz="900" b="0" i="0" dirty="0">
                 <a:solidFill>
                   <a:srgbClr val="000000"/>
                 </a:solidFill>
@@ -4140,6 +4232,32 @@
               </a:rPr>
               <a:t>per taxon and pollutant</a:t>
             </a:r>
+            <a:r>
+              <a:rPr lang="en-US" sz="900" dirty="0">
+                <a:solidFill>
+                  <a:srgbClr val="000000"/>
+                </a:solidFill>
+              </a:rPr>
+              <a:t> </a:t>
+            </a:r>
+          </a:p>
+          <a:p>
+            <a:pPr algn="ctr"/>
+            <a:r>
+              <a:rPr lang="en-US" sz="900" dirty="0">
+                <a:solidFill>
+                  <a:srgbClr val="000000"/>
+                </a:solidFill>
+                <a:latin typeface="Calibri"/>
+              </a:rPr>
+              <a:t>GAP filling using EPA OPERA QSAR model</a:t>
+            </a:r>
+            <a:endParaRPr sz="900" b="0" i="0" dirty="0">
+              <a:solidFill>
+                <a:srgbClr val="000000"/>
+              </a:solidFill>
+              <a:latin typeface="Calibri"/>
+            </a:endParaRPr>
           </a:p>
         </p:txBody>
       </p:sp>
@@ -4151,7 +4269,7 @@
         </p:nvSpPr>
         <p:spPr>
           <a:xfrm>
-            <a:off x="539999" y="5429520"/>
+            <a:off x="539999" y="5406660"/>
             <a:ext cx="1296000" cy="684000"/>
           </a:xfrm>
           <a:prstGeom prst="can">
@@ -4193,20 +4311,50 @@
               </a:spcAft>
             </a:pPr>
             <a:r>
-              <a:rPr sz="900" b="1" i="0" dirty="0" err="1">
-                <a:solidFill>
-                  <a:srgbClr val="000000"/>
-                </a:solidFill>
-                <a:latin typeface="Calibri"/>
-              </a:rPr>
-              <a:t>final_ecotox_data.fst</a:t>
-            </a:r>
-            <a:endParaRPr sz="900" b="1" i="0" dirty="0">
-              <a:solidFill>
-                <a:srgbClr val="000000"/>
-              </a:solidFill>
-              <a:latin typeface="Calibri"/>
-            </a:endParaRPr>
+              <a:rPr lang="en-US" sz="900" b="1" i="0" dirty="0">
+                <a:solidFill>
+                  <a:srgbClr val="000000"/>
+                </a:solidFill>
+                <a:latin typeface="Calibri"/>
+              </a:rPr>
+              <a:t>F</a:t>
+            </a:r>
+            <a:r>
+              <a:rPr sz="900" b="1" i="0" dirty="0">
+                <a:solidFill>
+                  <a:srgbClr val="000000"/>
+                </a:solidFill>
+                <a:latin typeface="Calibri"/>
+              </a:rPr>
+              <a:t>inal</a:t>
+            </a:r>
+            <a:r>
+              <a:rPr lang="en-US" sz="900" b="1" i="0" dirty="0">
+                <a:solidFill>
+                  <a:srgbClr val="000000"/>
+                </a:solidFill>
+                <a:latin typeface="Calibri"/>
+              </a:rPr>
+              <a:t> reference</a:t>
+            </a:r>
+            <a:r>
+              <a:rPr lang="en-US" sz="900" b="1" dirty="0">
+                <a:solidFill>
+                  <a:srgbClr val="000000"/>
+                </a:solidFill>
+                <a:latin typeface="Calibri"/>
+              </a:rPr>
+              <a:t> </a:t>
+            </a:r>
+            <a:r>
+              <a:rPr sz="900" b="1" i="0" dirty="0">
+                <a:solidFill>
+                  <a:srgbClr val="000000"/>
+                </a:solidFill>
+                <a:latin typeface="Calibri"/>
+              </a:rPr>
+              <a:t>data</a:t>
+            </a:r>
           </a:p>
         </p:txBody>
       </p:sp>
@@ -4218,7 +4366,7 @@
         </p:nvSpPr>
         <p:spPr>
           <a:xfrm>
-            <a:off x="3150000" y="1440000"/>
+            <a:off x="5055000" y="1386660"/>
             <a:ext cx="1584000" cy="468000"/>
           </a:xfrm>
           <a:prstGeom prst="parallelogram">
@@ -4317,7 +4465,7 @@
         </p:nvSpPr>
         <p:spPr>
           <a:xfrm>
-            <a:off x="3366000" y="2051999"/>
+            <a:off x="5271000" y="1998659"/>
             <a:ext cx="1152000" cy="540000"/>
           </a:xfrm>
           <a:prstGeom prst="diamond">
@@ -4379,7 +4527,7 @@
         </p:nvSpPr>
         <p:spPr>
           <a:xfrm>
-            <a:off x="4687200" y="2069999"/>
+            <a:off x="6729360" y="2016659"/>
             <a:ext cx="1296000" cy="503999"/>
           </a:xfrm>
           <a:prstGeom prst="roundRect">
@@ -4478,8 +4626,8 @@
         </p:nvSpPr>
         <p:spPr>
           <a:xfrm>
-            <a:off x="3222000" y="2721600"/>
-            <a:ext cx="1440000" cy="432000"/>
+            <a:off x="5112276" y="2767320"/>
+            <a:ext cx="1485204" cy="432000"/>
           </a:xfrm>
           <a:prstGeom prst="roundRect">
             <a:avLst/>
@@ -4558,8 +4706,8 @@
         </p:nvSpPr>
         <p:spPr>
           <a:xfrm>
-            <a:off x="3186000" y="3251201"/>
-            <a:ext cx="1512000" cy="576000"/>
+            <a:off x="5091000" y="3403601"/>
+            <a:ext cx="1512000" cy="432000"/>
           </a:xfrm>
           <a:prstGeom prst="roundRect">
             <a:avLst/>
@@ -4600,71 +4748,38 @@
               </a:spcAft>
             </a:pPr>
             <a:r>
-              <a:rPr sz="900" b="1" i="0">
-                <a:solidFill>
-                  <a:srgbClr val="000000"/>
-                </a:solidFill>
-                <a:latin typeface="Calibri"/>
-              </a:rPr>
-              <a:t>CASRN Layer 1</a:t>
-            </a:r>
-          </a:p>
-          <a:p>
-            <a:pPr algn="ctr">
-              <a:spcBef>
-                <a:spcPts val="0"/>
-              </a:spcBef>
-              <a:spcAft>
-                <a:spcPts val="0"/>
-              </a:spcAft>
-            </a:pPr>
-            <a:r>
-              <a:rPr sz="900" b="0" i="0">
-                <a:solidFill>
-                  <a:srgbClr val="000000"/>
-                </a:solidFill>
-                <a:latin typeface="Calibri"/>
-              </a:rPr>
-              <a:t>Exact match in</a:t>
-            </a:r>
-          </a:p>
-          <a:p>
-            <a:pPr algn="ctr">
-              <a:spcBef>
-                <a:spcPts val="0"/>
-              </a:spcBef>
-              <a:spcAft>
-                <a:spcPts val="0"/>
-              </a:spcAft>
-            </a:pPr>
-            <a:r>
-              <a:rPr sz="900" b="0" i="0">
-                <a:solidFill>
-                  <a:srgbClr val="000000"/>
-                </a:solidFill>
-                <a:latin typeface="Calibri"/>
-              </a:rPr>
-              <a:t>Known_CAS.fst</a:t>
-            </a:r>
-          </a:p>
-          <a:p>
-            <a:pPr algn="ctr">
-              <a:spcBef>
-                <a:spcPts val="0"/>
-              </a:spcBef>
-              <a:spcAft>
-                <a:spcPts val="0"/>
-              </a:spcAft>
-            </a:pPr>
-            <a:r>
-              <a:rPr sz="900" b="0" i="1">
-                <a:solidFill>
-                  <a:srgbClr val="000000"/>
-                </a:solidFill>
-                <a:latin typeface="Calibri"/>
-              </a:rPr>
-              <a:t>Status: Confirmed</a:t>
-            </a:r>
+              <a:rPr lang="en-US" sz="900" b="1" i="0" dirty="0">
+                <a:solidFill>
+                  <a:srgbClr val="000000"/>
+                </a:solidFill>
+                <a:latin typeface="Calibri"/>
+              </a:rPr>
+              <a:t>M</a:t>
+            </a:r>
+            <a:r>
+              <a:rPr sz="900" b="1" i="0" dirty="0">
+                <a:solidFill>
+                  <a:srgbClr val="000000"/>
+                </a:solidFill>
+                <a:latin typeface="Calibri"/>
+              </a:rPr>
+              <a:t>atch</a:t>
+            </a:r>
+            <a:r>
+              <a:rPr lang="en-US" sz="900" b="1" i="0" dirty="0">
+                <a:solidFill>
+                  <a:srgbClr val="000000"/>
+                </a:solidFill>
+                <a:latin typeface="Calibri"/>
+              </a:rPr>
+              <a:t> internal CASRNs table</a:t>
+            </a:r>
+            <a:endParaRPr sz="900" b="1" i="1" dirty="0">
+              <a:solidFill>
+                <a:srgbClr val="000000"/>
+              </a:solidFill>
+              <a:latin typeface="Calibri"/>
+            </a:endParaRPr>
           </a:p>
         </p:txBody>
       </p:sp>
@@ -4676,7 +4791,7 @@
         </p:nvSpPr>
         <p:spPr>
           <a:xfrm>
-            <a:off x="5241600" y="3146400"/>
+            <a:off x="7146600" y="3253080"/>
             <a:ext cx="1224000" cy="684000"/>
           </a:xfrm>
           <a:prstGeom prst="can">
@@ -4718,14 +4833,20 @@
               </a:spcAft>
             </a:pPr>
             <a:r>
-              <a:rPr sz="900" b="1" i="0">
-                <a:solidFill>
-                  <a:srgbClr val="000000"/>
-                </a:solidFill>
-                <a:latin typeface="Calibri"/>
-              </a:rPr>
-              <a:t>Known_CAS.fst</a:t>
-            </a:r>
+              <a:rPr lang="en-US" sz="900" b="1" i="0" dirty="0">
+                <a:solidFill>
+                  <a:srgbClr val="000000"/>
+                </a:solidFill>
+                <a:latin typeface="Calibri"/>
+              </a:rPr>
+              <a:t>Internal CASRNs table</a:t>
+            </a:r>
+            <a:endParaRPr sz="900" b="1" i="0" dirty="0">
+              <a:solidFill>
+                <a:srgbClr val="000000"/>
+              </a:solidFill>
+              <a:latin typeface="Calibri"/>
+            </a:endParaRPr>
           </a:p>
           <a:p>
             <a:pPr algn="ctr">
@@ -4737,26 +4858,7 @@
               </a:spcAft>
             </a:pPr>
             <a:r>
-              <a:rPr sz="900" b="0" i="0">
-                <a:solidFill>
-                  <a:srgbClr val="000000"/>
-                </a:solidFill>
-                <a:latin typeface="Calibri"/>
-              </a:rPr>
-              <a:t>Curated internal</a:t>
-            </a:r>
-          </a:p>
-          <a:p>
-            <a:pPr algn="ctr">
-              <a:spcBef>
-                <a:spcPts val="0"/>
-              </a:spcBef>
-              <a:spcAft>
-                <a:spcPts val="0"/>
-              </a:spcAft>
-            </a:pPr>
-            <a:r>
-              <a:rPr sz="900" b="0" i="0">
+              <a:rPr sz="900" b="0" i="0" dirty="0">
                 <a:solidFill>
                   <a:srgbClr val="000000"/>
                 </a:solidFill>
@@ -4775,7 +4877,7 @@
         </p:nvSpPr>
         <p:spPr>
           <a:xfrm>
-            <a:off x="3366000" y="3965068"/>
+            <a:off x="5263380" y="4048888"/>
             <a:ext cx="1152000" cy="540000"/>
           </a:xfrm>
           <a:prstGeom prst="diamond">
@@ -4817,7 +4919,7 @@
               </a:spcAft>
             </a:pPr>
             <a:r>
-              <a:rPr sz="900" b="0" i="0">
+              <a:rPr sz="900" b="0" i="0" dirty="0">
                 <a:solidFill>
                   <a:srgbClr val="000000"/>
                 </a:solidFill>
@@ -4837,7 +4939,7 @@
         </p:nvSpPr>
         <p:spPr>
           <a:xfrm>
-            <a:off x="4712400" y="3987265"/>
+            <a:off x="6617400" y="4055845"/>
             <a:ext cx="1440000" cy="463783"/>
           </a:xfrm>
           <a:prstGeom prst="roundRect">
@@ -4975,7 +5077,7 @@
         </p:nvSpPr>
         <p:spPr>
           <a:xfrm>
-            <a:off x="4856400" y="4649531"/>
+            <a:off x="6761400" y="4718111"/>
             <a:ext cx="1152000" cy="540000"/>
           </a:xfrm>
           <a:prstGeom prst="diamond">
@@ -5038,8 +5140,8 @@
         </p:nvSpPr>
         <p:spPr>
           <a:xfrm>
-            <a:off x="3228593" y="5313600"/>
-            <a:ext cx="1512000" cy="432000"/>
+            <a:off x="5171693" y="4810680"/>
+            <a:ext cx="1265324" cy="432000"/>
           </a:xfrm>
           <a:prstGeom prst="roundRect">
             <a:avLst/>
@@ -5080,13 +5182,13 @@
               </a:spcAft>
             </a:pPr>
             <a:r>
-              <a:rPr sz="900" b="1" i="0">
-                <a:solidFill>
-                  <a:srgbClr val="000000"/>
-                </a:solidFill>
-                <a:latin typeface="Calibri"/>
-              </a:rPr>
-              <a:t>Merge Resolved CASRNs</a:t>
+              <a:rPr sz="900" b="1" i="0" dirty="0">
+                <a:solidFill>
+                  <a:srgbClr val="000000"/>
+                </a:solidFill>
+                <a:latin typeface="Calibri"/>
+              </a:rPr>
+              <a:t>Merge CASRNs</a:t>
             </a:r>
           </a:p>
           <a:p>
@@ -5099,13 +5201,13 @@
               </a:spcAft>
             </a:pPr>
             <a:r>
-              <a:rPr sz="900" b="0" i="0">
-                <a:solidFill>
-                  <a:srgbClr val="000000"/>
-                </a:solidFill>
-                <a:latin typeface="Calibri"/>
-              </a:rPr>
-              <a:t>with concentration matrix</a:t>
+              <a:rPr sz="900" b="0" i="0" dirty="0">
+                <a:solidFill>
+                  <a:srgbClr val="000000"/>
+                </a:solidFill>
+                <a:latin typeface="Calibri"/>
+              </a:rPr>
+              <a:t>with concentration</a:t>
             </a:r>
           </a:p>
         </p:txBody>
@@ -5118,7 +5220,7 @@
         </p:nvSpPr>
         <p:spPr>
           <a:xfrm>
-            <a:off x="4974768" y="5326295"/>
+            <a:off x="6879768" y="5394875"/>
             <a:ext cx="885509" cy="385238"/>
           </a:xfrm>
           <a:prstGeom prst="roundRect">
@@ -5173,113 +5275,14 @@
       </p:sp>
       <p:sp>
         <p:nvSpPr>
-          <p:cNvPr id="32" name="Rounded Rectangle 31"/>
-          <p:cNvSpPr/>
-          <p:nvPr/>
-        </p:nvSpPr>
-        <p:spPr>
-          <a:xfrm>
-            <a:off x="3114000" y="6250332"/>
-            <a:ext cx="1655999" cy="503999"/>
-          </a:xfrm>
-          <a:prstGeom prst="roundRect">
-            <a:avLst/>
-          </a:prstGeom>
-          <a:solidFill>
-            <a:srgbClr val="F0F0F5"/>
-          </a:solidFill>
-          <a:ln w="13970">
-            <a:solidFill>
-              <a:srgbClr val="8282A0"/>
-            </a:solidFill>
-          </a:ln>
-        </p:spPr>
-        <p:style>
-          <a:lnRef idx="1">
-            <a:schemeClr val="accent1"/>
-          </a:lnRef>
-          <a:fillRef idx="3">
-            <a:schemeClr val="accent1"/>
-          </a:fillRef>
-          <a:effectRef idx="2">
-            <a:schemeClr val="accent1"/>
-          </a:effectRef>
-          <a:fontRef idx="minor">
-            <a:schemeClr val="lt1"/>
-          </a:fontRef>
-        </p:style>
-        <p:txBody>
-          <a:bodyPr wrap="square" lIns="21600" tIns="14400" rIns="21600" bIns="14400" rtlCol="0" anchor="ctr"/>
-          <a:lstStyle/>
-          <a:p>
-            <a:pPr algn="ctr">
-              <a:spcBef>
-                <a:spcPts val="0"/>
-              </a:spcBef>
-              <a:spcAft>
-                <a:spcPts val="0"/>
-              </a:spcAft>
-            </a:pPr>
-            <a:r>
-              <a:rPr sz="900" b="1" i="0">
-                <a:solidFill>
-                  <a:srgbClr val="000000"/>
-                </a:solidFill>
-                <a:latin typeface="Calibri"/>
-              </a:rPr>
-              <a:t>Join with ECOTOX data</a:t>
-            </a:r>
-          </a:p>
-          <a:p>
-            <a:pPr algn="ctr">
-              <a:spcBef>
-                <a:spcPts val="0"/>
-              </a:spcBef>
-              <a:spcAft>
-                <a:spcPts val="0"/>
-              </a:spcAft>
-            </a:pPr>
-            <a:r>
-              <a:rPr sz="900" b="0" i="0">
-                <a:solidFill>
-                  <a:srgbClr val="000000"/>
-                </a:solidFill>
-                <a:latin typeface="Calibri"/>
-              </a:rPr>
-              <a:t>Match on cas_number</a:t>
-            </a:r>
-          </a:p>
-          <a:p>
-            <a:pPr algn="ctr">
-              <a:spcBef>
-                <a:spcPts val="0"/>
-              </a:spcBef>
-              <a:spcAft>
-                <a:spcPts val="0"/>
-              </a:spcAft>
-            </a:pPr>
-            <a:r>
-              <a:rPr sz="900" b="0" i="0">
-                <a:solidFill>
-                  <a:srgbClr val="000000"/>
-                </a:solidFill>
-                <a:latin typeface="Calibri"/>
-              </a:rPr>
-              <a:t>Group: algae / crustacean / fish</a:t>
-            </a:r>
-          </a:p>
-        </p:txBody>
-      </p:sp>
-      <p:sp>
-        <p:nvSpPr>
           <p:cNvPr id="33" name="Rounded Rectangle 32"/>
           <p:cNvSpPr/>
           <p:nvPr/>
         </p:nvSpPr>
         <p:spPr>
           <a:xfrm>
-            <a:off x="1602000" y="7045199"/>
-            <a:ext cx="1440000" cy="792000"/>
+            <a:off x="5458399" y="7199467"/>
+            <a:ext cx="900000" cy="792000"/>
           </a:xfrm>
           <a:prstGeom prst="roundRect">
             <a:avLst/>
@@ -5320,7 +5323,7 @@
               </a:spcAft>
             </a:pPr>
             <a:r>
-              <a:rPr sz="900" b="1" i="0">
+              <a:rPr sz="900" b="1" i="0" dirty="0">
                 <a:solidFill>
                   <a:srgbClr val="1E6E14"/>
                 </a:solidFill>
@@ -5339,7 +5342,7 @@
               </a:spcAft>
             </a:pPr>
             <a:r>
-              <a:rPr sz="900" b="0" i="0">
+              <a:rPr sz="900" b="0" i="0" dirty="0">
                 <a:solidFill>
                   <a:srgbClr val="000000"/>
                 </a:solidFill>
@@ -5358,7 +5361,7 @@
               </a:spcAft>
             </a:pPr>
             <a:r>
-              <a:rPr sz="900" b="0" i="0">
+              <a:rPr sz="900" b="0" i="0" dirty="0">
                 <a:solidFill>
                   <a:srgbClr val="000000"/>
                 </a:solidFill>
@@ -5377,8 +5380,8 @@
         </p:nvSpPr>
         <p:spPr>
           <a:xfrm>
-            <a:off x="1602000" y="8179200"/>
-            <a:ext cx="1440000" cy="468000"/>
+            <a:off x="5458399" y="8333468"/>
+            <a:ext cx="900000" cy="468000"/>
           </a:xfrm>
           <a:prstGeom prst="roundRect">
             <a:avLst/>
@@ -5457,8 +5460,8 @@
         </p:nvSpPr>
         <p:spPr>
           <a:xfrm>
-            <a:off x="3222000" y="7045199"/>
-            <a:ext cx="1440000" cy="792000"/>
+            <a:off x="6537379" y="7199467"/>
+            <a:ext cx="900000" cy="792000"/>
           </a:xfrm>
           <a:prstGeom prst="roundRect">
             <a:avLst/>
@@ -5556,8 +5559,8 @@
         </p:nvSpPr>
         <p:spPr>
           <a:xfrm>
-            <a:off x="3222000" y="8179200"/>
-            <a:ext cx="1440000" cy="468000"/>
+            <a:off x="6537379" y="8333468"/>
+            <a:ext cx="900000" cy="468000"/>
           </a:xfrm>
           <a:prstGeom prst="roundRect">
             <a:avLst/>
@@ -5636,8 +5639,8 @@
         </p:nvSpPr>
         <p:spPr>
           <a:xfrm>
-            <a:off x="4842000" y="7045199"/>
-            <a:ext cx="1440000" cy="792000"/>
+            <a:off x="7639219" y="7199467"/>
+            <a:ext cx="900000" cy="792000"/>
           </a:xfrm>
           <a:prstGeom prst="roundRect">
             <a:avLst/>
@@ -5735,8 +5738,8 @@
         </p:nvSpPr>
         <p:spPr>
           <a:xfrm>
-            <a:off x="4842000" y="8179200"/>
-            <a:ext cx="1440000" cy="468000"/>
+            <a:off x="7639219" y="8333468"/>
+            <a:ext cx="900000" cy="468000"/>
           </a:xfrm>
           <a:prstGeom prst="roundRect">
             <a:avLst/>
@@ -5815,8 +5818,8 @@
         </p:nvSpPr>
         <p:spPr>
           <a:xfrm>
-            <a:off x="1404000" y="9077460"/>
-            <a:ext cx="1512000" cy="684000"/>
+            <a:off x="3621420" y="9313680"/>
+            <a:ext cx="900000" cy="900000"/>
           </a:xfrm>
           <a:prstGeom prst="roundRect">
             <a:avLst/>
@@ -5857,7 +5860,7 @@
               </a:spcAft>
             </a:pPr>
             <a:r>
-              <a:rPr sz="900" b="1" i="0">
+              <a:rPr sz="900" b="1" i="0" dirty="0">
                 <a:solidFill>
                   <a:srgbClr val="C82828"/>
                 </a:solidFill>
@@ -5865,6 +5868,12 @@
               </a:rPr>
               <a:t>Interactive Plots</a:t>
             </a:r>
+            <a:endParaRPr lang="en-US" sz="900" b="1" i="0" dirty="0">
+              <a:solidFill>
+                <a:srgbClr val="C82828"/>
+              </a:solidFill>
+              <a:latin typeface="Calibri"/>
+            </a:endParaRPr>
           </a:p>
           <a:p>
             <a:pPr algn="ctr">
@@ -5876,14 +5885,20 @@
               </a:spcAft>
             </a:pPr>
             <a:r>
-              <a:rPr sz="900" b="0" i="0">
-                <a:solidFill>
-                  <a:srgbClr val="000000"/>
-                </a:solidFill>
-                <a:latin typeface="Calibri"/>
-              </a:rPr>
-              <a:t>ggplot2 bar charts</a:t>
-            </a:r>
+              <a:rPr lang="en-US" sz="900" b="0" i="0" dirty="0">
+                <a:solidFill>
+                  <a:srgbClr val="000000"/>
+                </a:solidFill>
+                <a:latin typeface="Calibri"/>
+              </a:rPr>
+              <a:t>Box plots</a:t>
+            </a:r>
+            <a:endParaRPr sz="900" b="0" i="0" dirty="0">
+              <a:solidFill>
+                <a:srgbClr val="000000"/>
+              </a:solidFill>
+              <a:latin typeface="Calibri"/>
+            </a:endParaRPr>
           </a:p>
           <a:p>
             <a:pPr algn="ctr">
@@ -5895,14 +5910,20 @@
               </a:spcAft>
             </a:pPr>
             <a:r>
-              <a:rPr sz="900" b="0" i="0">
-                <a:solidFill>
-                  <a:srgbClr val="000000"/>
-                </a:solidFill>
-                <a:latin typeface="Calibri"/>
-              </a:rPr>
-              <a:t>Per-sample PTI</a:t>
-            </a:r>
+              <a:rPr sz="900" b="0" i="0" dirty="0">
+                <a:solidFill>
+                  <a:srgbClr val="000000"/>
+                </a:solidFill>
+                <a:latin typeface="Calibri"/>
+              </a:rPr>
+              <a:t>Per-sample </a:t>
+            </a:r>
+            <a:endParaRPr lang="en-US" sz="900" b="0" i="0" dirty="0">
+              <a:solidFill>
+                <a:srgbClr val="000000"/>
+              </a:solidFill>
+              <a:latin typeface="Calibri"/>
+            </a:endParaRPr>
           </a:p>
           <a:p>
             <a:pPr algn="ctr">
@@ -5914,13 +5935,13 @@
               </a:spcAft>
             </a:pPr>
             <a:r>
-              <a:rPr sz="900" b="0" i="0">
-                <a:solidFill>
-                  <a:srgbClr val="000000"/>
-                </a:solidFill>
-                <a:latin typeface="Calibri"/>
-              </a:rPr>
-              <a:t>Per-pollutant TU</a:t>
+              <a:rPr sz="900" b="0" i="0" dirty="0">
+                <a:solidFill>
+                  <a:srgbClr val="000000"/>
+                </a:solidFill>
+                <a:latin typeface="Calibri"/>
+              </a:rPr>
+              <a:t>Per-pollutant</a:t>
             </a:r>
           </a:p>
         </p:txBody>
@@ -5933,8 +5954,8 @@
         </p:nvSpPr>
         <p:spPr>
           <a:xfrm>
-            <a:off x="3150000" y="9077460"/>
-            <a:ext cx="1584000" cy="684000"/>
+            <a:off x="4734960" y="9313200"/>
+            <a:ext cx="900000" cy="900000"/>
           </a:xfrm>
           <a:prstGeom prst="roundRect">
             <a:avLst/>
@@ -5975,7 +5996,7 @@
               </a:spcAft>
             </a:pPr>
             <a:r>
-              <a:rPr sz="900" b="1" i="0">
+              <a:rPr sz="900" b="1" i="0" dirty="0">
                 <a:solidFill>
                   <a:srgbClr val="C82828"/>
                 </a:solidFill>
@@ -5994,22 +6015,13 @@
               </a:spcAft>
             </a:pPr>
             <a:r>
-              <a:rPr sz="900" b="0" i="0">
-                <a:solidFill>
-                  <a:srgbClr val="000000"/>
-                </a:solidFill>
-                <a:latin typeface="Calibri"/>
-              </a:rPr>
-              <a:t>PTI ≥ 1.0: </a:t>
-            </a:r>
-            <a:r>
-              <a:rPr sz="900" b="1" i="0">
+              <a:rPr sz="900" b="1" i="0" dirty="0">
                 <a:solidFill>
                   <a:srgbClr val="C82828"/>
                 </a:solidFill>
                 <a:latin typeface="Calibri"/>
               </a:rPr>
-              <a:t>Acute risk</a:t>
+              <a:t>Acute</a:t>
             </a:r>
           </a:p>
           <a:p>
@@ -6022,22 +6034,13 @@
               </a:spcAft>
             </a:pPr>
             <a:r>
-              <a:rPr sz="900" b="0" i="0">
-                <a:solidFill>
-                  <a:srgbClr val="000000"/>
-                </a:solidFill>
-                <a:latin typeface="Calibri"/>
-              </a:rPr>
-              <a:t>PTI 0.1–1.0: </a:t>
-            </a:r>
-            <a:r>
-              <a:rPr sz="900" b="1" i="0">
+              <a:rPr sz="900" b="1" i="0" dirty="0">
                 <a:solidFill>
                   <a:srgbClr val="D28C00"/>
                 </a:solidFill>
                 <a:latin typeface="Calibri"/>
               </a:rPr>
-              <a:t>Chronic risk</a:t>
+              <a:t>Chronic</a:t>
             </a:r>
           </a:p>
           <a:p>
@@ -6050,22 +6053,13 @@
               </a:spcAft>
             </a:pPr>
             <a:r>
-              <a:rPr sz="900" b="0" i="0">
-                <a:solidFill>
-                  <a:srgbClr val="000000"/>
-                </a:solidFill>
-                <a:latin typeface="Calibri"/>
-              </a:rPr>
-              <a:t>PTI &lt; 0.1: </a:t>
-            </a:r>
-            <a:r>
-              <a:rPr sz="900" b="1" i="0">
+              <a:rPr sz="900" b="1" i="0" dirty="0">
                 <a:solidFill>
                   <a:srgbClr val="289632"/>
                 </a:solidFill>
                 <a:latin typeface="Calibri"/>
               </a:rPr>
-              <a:t>Low risk</a:t>
+              <a:t>Low</a:t>
             </a:r>
           </a:p>
         </p:txBody>
@@ -6078,8 +6072,8 @@
         </p:nvSpPr>
         <p:spPr>
           <a:xfrm>
-            <a:off x="4896000" y="9077460"/>
-            <a:ext cx="1655999" cy="684000"/>
+            <a:off x="5863740" y="9313678"/>
+            <a:ext cx="900000" cy="900000"/>
           </a:xfrm>
           <a:prstGeom prst="roundRect">
             <a:avLst/>
@@ -6120,13 +6114,13 @@
               </a:spcAft>
             </a:pPr>
             <a:r>
-              <a:rPr sz="900" b="1" i="0">
+              <a:rPr sz="900" b="1" i="0" dirty="0">
                 <a:solidFill>
                   <a:srgbClr val="C82828"/>
                 </a:solidFill>
                 <a:latin typeface="Calibri"/>
               </a:rPr>
-              <a:t>Excel Export (.xlsx)</a:t>
+              <a:t>Excel Export</a:t>
             </a:r>
           </a:p>
           <a:p>
@@ -6139,13 +6133,13 @@
               </a:spcAft>
             </a:pPr>
             <a:r>
-              <a:rPr sz="900" b="0" i="0">
-                <a:solidFill>
-                  <a:srgbClr val="000000"/>
-                </a:solidFill>
-                <a:latin typeface="Calibri"/>
-              </a:rPr>
-              <a:t>Legend / Original data</a:t>
+              <a:rPr sz="900" b="0" i="0" dirty="0">
+                <a:solidFill>
+                  <a:srgbClr val="000000"/>
+                </a:solidFill>
+                <a:latin typeface="Calibri"/>
+              </a:rPr>
+              <a:t>Original data</a:t>
             </a:r>
           </a:p>
           <a:p>
@@ -6158,14 +6152,20 @@
               </a:spcAft>
             </a:pPr>
             <a:r>
-              <a:rPr sz="900" b="0" i="0">
-                <a:solidFill>
-                  <a:srgbClr val="000000"/>
-                </a:solidFill>
-                <a:latin typeface="Calibri"/>
-              </a:rPr>
-              <a:t>Algae / Crust. / Fish</a:t>
-            </a:r>
+              <a:rPr lang="en-US" sz="900" b="0" i="0" dirty="0">
+                <a:solidFill>
+                  <a:srgbClr val="000000"/>
+                </a:solidFill>
+                <a:latin typeface="Calibri"/>
+              </a:rPr>
+              <a:t>Taxon Toxicity index</a:t>
+            </a:r>
+            <a:endParaRPr sz="900" b="0" i="0" dirty="0">
+              <a:solidFill>
+                <a:srgbClr val="000000"/>
+              </a:solidFill>
+              <a:latin typeface="Calibri"/>
+            </a:endParaRPr>
           </a:p>
           <a:p>
             <a:pPr algn="ctr">
@@ -6177,32 +6177,31 @@
               </a:spcAft>
             </a:pPr>
             <a:r>
-              <a:rPr sz="900" b="0" i="0">
-                <a:solidFill>
-                  <a:srgbClr val="000000"/>
-                </a:solidFill>
-                <a:latin typeface="Calibri"/>
-              </a:rPr>
-              <a:t>CASRN Report</a:t>
-            </a:r>
-          </a:p>
-          <a:p>
-            <a:pPr algn="ctr">
-              <a:spcBef>
-                <a:spcPts val="0"/>
-              </a:spcBef>
-              <a:spcAft>
-                <a:spcPts val="0"/>
-              </a:spcAft>
-            </a:pPr>
-            <a:r>
-              <a:rPr sz="900" b="0" i="0">
-                <a:solidFill>
-                  <a:srgbClr val="000000"/>
-                </a:solidFill>
-                <a:latin typeface="Calibri"/>
-              </a:rPr>
-              <a:t>Coverage Matrix</a:t>
+              <a:rPr sz="900" b="0" i="0" dirty="0">
+                <a:solidFill>
+                  <a:srgbClr val="000000"/>
+                </a:solidFill>
+                <a:latin typeface="Calibri"/>
+              </a:rPr>
+              <a:t>CASRN</a:t>
+            </a:r>
+            <a:r>
+              <a:rPr lang="en-US" sz="900" b="0" i="0" dirty="0">
+                <a:solidFill>
+                  <a:srgbClr val="000000"/>
+                </a:solidFill>
+                <a:latin typeface="Calibri"/>
+              </a:rPr>
+              <a:t> coverage r</a:t>
+            </a:r>
+            <a:r>
+              <a:rPr sz="900" b="0" i="0" dirty="0">
+                <a:solidFill>
+                  <a:srgbClr val="000000"/>
+                </a:solidFill>
+                <a:latin typeface="Calibri"/>
+              </a:rPr>
+              <a:t>eport</a:t>
             </a:r>
           </a:p>
         </p:txBody>
@@ -6252,7 +6251,7 @@
         <p:spPr>
           <a:xfrm>
             <a:off x="1188000" y="2936520"/>
-            <a:ext cx="0" cy="259200"/>
+            <a:ext cx="0" cy="180000"/>
           </a:xfrm>
           <a:prstGeom prst="line">
             <a:avLst/>
@@ -6287,7 +6286,7 @@
         </p:nvCxnSpPr>
         <p:spPr>
           <a:xfrm>
-            <a:off x="1188000" y="3616920"/>
+            <a:off x="1188000" y="3586440"/>
             <a:ext cx="0" cy="178200"/>
           </a:xfrm>
           <a:prstGeom prst="line">
@@ -6327,8 +6326,8 @@
         </p:nvCxnSpPr>
         <p:spPr>
           <a:xfrm flipH="1">
-            <a:off x="1187999" y="4684320"/>
-            <a:ext cx="1" cy="160350"/>
+            <a:off x="1187999" y="4443785"/>
+            <a:ext cx="1" cy="160026"/>
           </a:xfrm>
           <a:prstGeom prst="line">
             <a:avLst/>
@@ -6366,7 +6365,7 @@
         </p:nvCxnSpPr>
         <p:spPr>
           <a:xfrm>
-            <a:off x="1187999" y="5276670"/>
+            <a:off x="1187999" y="5230950"/>
             <a:ext cx="1" cy="187050"/>
           </a:xfrm>
           <a:prstGeom prst="line">
@@ -6377,83 +6376,6 @@
               <a:srgbClr val="5B82B9"/>
             </a:solidFill>
             <a:tailEnd type="triangle"/>
-          </a:ln>
-        </p:spPr>
-        <p:style>
-          <a:lnRef idx="2">
-            <a:schemeClr val="accent1"/>
-          </a:lnRef>
-          <a:fillRef idx="0">
-            <a:schemeClr val="accent1"/>
-          </a:fillRef>
-          <a:effectRef idx="1">
-            <a:schemeClr val="accent1"/>
-          </a:effectRef>
-          <a:fontRef idx="minor">
-            <a:schemeClr val="tx1"/>
-          </a:fontRef>
-        </p:style>
-      </p:cxnSp>
-      <p:cxnSp>
-        <p:nvCxnSpPr>
-          <p:cNvPr id="47" name="Connector 46"/>
-          <p:cNvCxnSpPr>
-            <a:cxnSpLocks/>
-            <a:stCxn id="20" idx="4"/>
-          </p:cNvCxnSpPr>
-          <p:nvPr/>
-        </p:nvCxnSpPr>
-        <p:spPr>
-          <a:xfrm flipV="1">
-            <a:off x="1835999" y="5724000"/>
-            <a:ext cx="1360800" cy="47520"/>
-          </a:xfrm>
-          <a:prstGeom prst="line">
-            <a:avLst/>
-          </a:prstGeom>
-          <a:ln w="15240">
-            <a:solidFill>
-              <a:srgbClr val="8282A0"/>
-            </a:solidFill>
-            <a:prstDash val="dash"/>
-            <a:tailEnd type="none"/>
-          </a:ln>
-        </p:spPr>
-        <p:style>
-          <a:lnRef idx="2">
-            <a:schemeClr val="accent1"/>
-          </a:lnRef>
-          <a:fillRef idx="0">
-            <a:schemeClr val="accent1"/>
-          </a:fillRef>
-          <a:effectRef idx="1">
-            <a:schemeClr val="accent1"/>
-          </a:effectRef>
-          <a:fontRef idx="minor">
-            <a:schemeClr val="tx1"/>
-          </a:fontRef>
-        </p:style>
-      </p:cxnSp>
-      <p:cxnSp>
-        <p:nvCxnSpPr>
-          <p:cNvPr id="48" name="Connector 47"/>
-          <p:cNvCxnSpPr/>
-          <p:nvPr/>
-        </p:nvCxnSpPr>
-        <p:spPr>
-          <a:xfrm flipH="1">
-            <a:off x="4622400" y="3488400"/>
-            <a:ext cx="680400" cy="0"/>
-          </a:xfrm>
-          <a:prstGeom prst="line">
-            <a:avLst/>
-          </a:prstGeom>
-          <a:ln w="15240">
-            <a:solidFill>
-              <a:srgbClr val="8282A0"/>
-            </a:solidFill>
-            <a:prstDash val="dash"/>
-            <a:tailEnd type="none"/>
           </a:ln>
         </p:spPr>
         <p:style>
@@ -6479,8 +6401,8 @@
         </p:nvCxnSpPr>
         <p:spPr>
           <a:xfrm>
-            <a:off x="3942000" y="1884599"/>
-            <a:ext cx="0" cy="194401"/>
+            <a:off x="5847000" y="1831258"/>
+            <a:ext cx="0" cy="216000"/>
           </a:xfrm>
           <a:prstGeom prst="line">
             <a:avLst/>
@@ -6515,8 +6437,8 @@
         </p:nvCxnSpPr>
         <p:spPr>
           <a:xfrm>
-            <a:off x="3942000" y="2565000"/>
-            <a:ext cx="0" cy="178199"/>
+            <a:off x="5847000" y="2542139"/>
+            <a:ext cx="0" cy="216000"/>
           </a:xfrm>
           <a:prstGeom prst="line">
             <a:avLst/>
@@ -6551,8 +6473,8 @@
         </p:nvSpPr>
         <p:spPr>
           <a:xfrm>
-            <a:off x="3513838" y="2534741"/>
-            <a:ext cx="856325" cy="230832"/>
+            <a:off x="5022598" y="2466161"/>
+            <a:ext cx="856325" cy="252000"/>
           </a:xfrm>
           <a:prstGeom prst="rect">
             <a:avLst/>
@@ -6607,7 +6529,7 @@
         </p:nvCxnSpPr>
         <p:spPr>
           <a:xfrm>
-            <a:off x="4460400" y="2321999"/>
+            <a:off x="6403500" y="2268659"/>
             <a:ext cx="291600" cy="0"/>
           </a:xfrm>
           <a:prstGeom prst="line">
@@ -6643,7 +6565,7 @@
         </p:nvSpPr>
         <p:spPr>
           <a:xfrm>
-            <a:off x="4318232" y="2164067"/>
+            <a:off x="6207992" y="1882127"/>
             <a:ext cx="505268" cy="369332"/>
           </a:xfrm>
           <a:prstGeom prst="rect">
@@ -6707,8 +6629,8 @@
         </p:nvCxnSpPr>
         <p:spPr>
           <a:xfrm flipH="1">
-            <a:off x="4649269" y="2582668"/>
-            <a:ext cx="745200" cy="388800"/>
+            <a:off x="6599989" y="2529328"/>
+            <a:ext cx="684000" cy="388800"/>
           </a:xfrm>
           <a:prstGeom prst="line">
             <a:avLst/>
@@ -6740,14 +6662,13 @@
           <p:cNvPr id="55" name="Connector 54"/>
           <p:cNvCxnSpPr>
             <a:cxnSpLocks/>
-            <a:endCxn id="25" idx="0"/>
           </p:cNvCxnSpPr>
           <p:nvPr/>
         </p:nvCxnSpPr>
         <p:spPr>
           <a:xfrm>
-            <a:off x="3942000" y="3131999"/>
-            <a:ext cx="0" cy="119202"/>
+            <a:off x="5847000" y="3208199"/>
+            <a:ext cx="0" cy="216000"/>
           </a:xfrm>
           <a:prstGeom prst="line">
             <a:avLst/>
@@ -6779,14 +6700,13 @@
           <p:cNvPr id="56" name="Connector 55"/>
           <p:cNvCxnSpPr>
             <a:cxnSpLocks/>
-            <a:stCxn id="25" idx="2"/>
           </p:cNvCxnSpPr>
           <p:nvPr/>
         </p:nvCxnSpPr>
         <p:spPr>
           <a:xfrm>
-            <a:off x="3942000" y="3827201"/>
-            <a:ext cx="0" cy="130999"/>
+            <a:off x="5847000" y="3835601"/>
+            <a:ext cx="0" cy="216000"/>
           </a:xfrm>
           <a:prstGeom prst="line">
             <a:avLst/>
@@ -6821,7 +6741,7 @@
         </p:nvCxnSpPr>
         <p:spPr>
           <a:xfrm>
-            <a:off x="4476729" y="4233858"/>
+            <a:off x="6381729" y="4302438"/>
             <a:ext cx="252000" cy="0"/>
           </a:xfrm>
           <a:prstGeom prst="line">
@@ -6849,44 +6769,6 @@
           </a:fontRef>
         </p:style>
       </p:cxnSp>
-      <p:sp>
-        <p:nvSpPr>
-          <p:cNvPr id="60" name="TextBox 59"/>
-          <p:cNvSpPr txBox="1"/>
-          <p:nvPr/>
-        </p:nvSpPr>
-        <p:spPr>
-          <a:xfrm>
-            <a:off x="3645605" y="4791043"/>
-            <a:ext cx="343364" cy="230832"/>
-          </a:xfrm>
-          <a:prstGeom prst="rect">
-            <a:avLst/>
-          </a:prstGeom>
-          <a:noFill/>
-          <a:ln>
-            <a:noFill/>
-          </a:ln>
-        </p:spPr>
-        <p:txBody>
-          <a:bodyPr wrap="none">
-            <a:spAutoFit/>
-          </a:bodyPr>
-          <a:lstStyle/>
-          <a:p>
-            <a:pPr algn="ctr"/>
-            <a:r>
-              <a:rPr sz="900" dirty="0">
-                <a:solidFill>
-                  <a:srgbClr val="000000"/>
-                </a:solidFill>
-                <a:latin typeface="Calibri"/>
-              </a:rPr>
-              <a:t>Yes</a:t>
-            </a:r>
-          </a:p>
-        </p:txBody>
-      </p:sp>
       <p:cxnSp>
         <p:nvCxnSpPr>
           <p:cNvPr id="61" name="Connector 60"/>
@@ -6898,7 +6780,7 @@
         </p:nvCxnSpPr>
         <p:spPr>
           <a:xfrm>
-            <a:off x="5432400" y="4433531"/>
+            <a:off x="7337400" y="4502111"/>
             <a:ext cx="0" cy="216000"/>
           </a:xfrm>
           <a:prstGeom prst="line">
@@ -6935,9 +6817,9 @@
           <p:nvPr/>
         </p:nvCxnSpPr>
         <p:spPr>
-          <a:xfrm flipH="1">
-            <a:off x="3932954" y="4505068"/>
-            <a:ext cx="0" cy="814498"/>
+          <a:xfrm>
+            <a:off x="5837954" y="4588888"/>
+            <a:ext cx="0" cy="216000"/>
           </a:xfrm>
           <a:prstGeom prst="line">
             <a:avLst/>
@@ -6964,44 +6846,6 @@
           </a:fontRef>
         </p:style>
       </p:cxnSp>
-      <p:sp>
-        <p:nvSpPr>
-          <p:cNvPr id="63" name="TextBox 62"/>
-          <p:cNvSpPr txBox="1"/>
-          <p:nvPr/>
-        </p:nvSpPr>
-        <p:spPr>
-          <a:xfrm>
-            <a:off x="4301875" y="4919531"/>
-            <a:ext cx="343364" cy="230832"/>
-          </a:xfrm>
-          <a:prstGeom prst="rect">
-            <a:avLst/>
-          </a:prstGeom>
-          <a:noFill/>
-          <a:ln>
-            <a:noFill/>
-          </a:ln>
-        </p:spPr>
-        <p:txBody>
-          <a:bodyPr wrap="none">
-            <a:spAutoFit/>
-          </a:bodyPr>
-          <a:lstStyle/>
-          <a:p>
-            <a:pPr algn="ctr"/>
-            <a:r>
-              <a:rPr sz="900" dirty="0">
-                <a:solidFill>
-                  <a:srgbClr val="000000"/>
-                </a:solidFill>
-                <a:latin typeface="Calibri"/>
-              </a:rPr>
-              <a:t>Yes</a:t>
-            </a:r>
-          </a:p>
-        </p:txBody>
-      </p:sp>
       <p:cxnSp>
         <p:nvCxnSpPr>
           <p:cNvPr id="64" name="Connector 63"/>
@@ -7012,7 +6856,7 @@
         </p:nvCxnSpPr>
         <p:spPr>
           <a:xfrm>
-            <a:off x="5429186" y="5174651"/>
+            <a:off x="7334186" y="5243231"/>
             <a:ext cx="0" cy="171255"/>
           </a:xfrm>
           <a:prstGeom prst="line">
@@ -7048,7 +6892,7 @@
         </p:nvSpPr>
         <p:spPr>
           <a:xfrm>
-            <a:off x="5415606" y="5130995"/>
+            <a:off x="7320606" y="5199575"/>
             <a:ext cx="319318" cy="230832"/>
           </a:xfrm>
           <a:prstGeom prst="rect">
@@ -7088,8 +6932,8 @@
         </p:nvCxnSpPr>
         <p:spPr>
           <a:xfrm flipH="1">
-            <a:off x="3984593" y="4919531"/>
-            <a:ext cx="877872" cy="358069"/>
+            <a:off x="6424277" y="5018591"/>
+            <a:ext cx="360000" cy="0"/>
           </a:xfrm>
           <a:prstGeom prst="line">
             <a:avLst/>
@@ -7121,14 +6965,13 @@
           <p:cNvPr id="67" name="Connector 66"/>
           <p:cNvCxnSpPr>
             <a:cxnSpLocks/>
-            <a:stCxn id="31" idx="1"/>
           </p:cNvCxnSpPr>
           <p:nvPr/>
         </p:nvCxnSpPr>
         <p:spPr>
           <a:xfrm flipH="1" flipV="1">
-            <a:off x="4758426" y="5513052"/>
-            <a:ext cx="216342" cy="0"/>
+            <a:off x="6437017" y="5148600"/>
+            <a:ext cx="442751" cy="553194"/>
           </a:xfrm>
           <a:prstGeom prst="line">
             <a:avLst/>
@@ -7138,120 +6981,6 @@
               <a:srgbClr val="3CA05A"/>
             </a:solidFill>
             <a:tailEnd type="triangle"/>
-          </a:ln>
-        </p:spPr>
-        <p:style>
-          <a:lnRef idx="2">
-            <a:schemeClr val="accent1"/>
-          </a:lnRef>
-          <a:fillRef idx="0">
-            <a:schemeClr val="accent1"/>
-          </a:fillRef>
-          <a:effectRef idx="1">
-            <a:schemeClr val="accent1"/>
-          </a:effectRef>
-          <a:fontRef idx="minor">
-            <a:schemeClr val="tx1"/>
-          </a:fontRef>
-        </p:style>
-      </p:cxnSp>
-      <p:cxnSp>
-        <p:nvCxnSpPr>
-          <p:cNvPr id="68" name="Connector 67"/>
-          <p:cNvCxnSpPr>
-            <a:cxnSpLocks/>
-          </p:cNvCxnSpPr>
-          <p:nvPr/>
-        </p:nvCxnSpPr>
-        <p:spPr>
-          <a:xfrm flipH="1">
-            <a:off x="2322000" y="6755400"/>
-            <a:ext cx="1602100" cy="329400"/>
-          </a:xfrm>
-          <a:prstGeom prst="line">
-            <a:avLst/>
-          </a:prstGeom>
-          <a:ln w="15240">
-            <a:solidFill>
-              <a:srgbClr val="3C9628"/>
-            </a:solidFill>
-            <a:tailEnd type="none"/>
-          </a:ln>
-        </p:spPr>
-        <p:style>
-          <a:lnRef idx="2">
-            <a:schemeClr val="accent1"/>
-          </a:lnRef>
-          <a:fillRef idx="0">
-            <a:schemeClr val="accent1"/>
-          </a:fillRef>
-          <a:effectRef idx="1">
-            <a:schemeClr val="accent1"/>
-          </a:effectRef>
-          <a:fontRef idx="minor">
-            <a:schemeClr val="tx1"/>
-          </a:fontRef>
-        </p:style>
-      </p:cxnSp>
-      <p:cxnSp>
-        <p:nvCxnSpPr>
-          <p:cNvPr id="69" name="Connector 68"/>
-          <p:cNvCxnSpPr>
-            <a:cxnSpLocks/>
-          </p:cNvCxnSpPr>
-          <p:nvPr/>
-        </p:nvCxnSpPr>
-        <p:spPr>
-          <a:xfrm>
-            <a:off x="3941999" y="6755400"/>
-            <a:ext cx="1" cy="329400"/>
-          </a:xfrm>
-          <a:prstGeom prst="line">
-            <a:avLst/>
-          </a:prstGeom>
-          <a:ln w="15240">
-            <a:solidFill>
-              <a:srgbClr val="D27814"/>
-            </a:solidFill>
-            <a:tailEnd type="none"/>
-          </a:ln>
-        </p:spPr>
-        <p:style>
-          <a:lnRef idx="2">
-            <a:schemeClr val="accent1"/>
-          </a:lnRef>
-          <a:fillRef idx="0">
-            <a:schemeClr val="accent1"/>
-          </a:fillRef>
-          <a:effectRef idx="1">
-            <a:schemeClr val="accent1"/>
-          </a:effectRef>
-          <a:fontRef idx="minor">
-            <a:schemeClr val="tx1"/>
-          </a:fontRef>
-        </p:style>
-      </p:cxnSp>
-      <p:cxnSp>
-        <p:nvCxnSpPr>
-          <p:cNvPr id="70" name="Connector 69"/>
-          <p:cNvCxnSpPr>
-            <a:cxnSpLocks/>
-          </p:cNvCxnSpPr>
-          <p:nvPr/>
-        </p:nvCxnSpPr>
-        <p:spPr>
-          <a:xfrm>
-            <a:off x="3959900" y="6755400"/>
-            <a:ext cx="1602100" cy="329400"/>
-          </a:xfrm>
-          <a:prstGeom prst="line">
-            <a:avLst/>
-          </a:prstGeom>
-          <a:ln w="15240">
-            <a:solidFill>
-              <a:srgbClr val="326EC8"/>
-            </a:solidFill>
-            <a:tailEnd type="none"/>
           </a:ln>
         </p:spPr>
         <p:style>
@@ -7277,7 +7006,7 @@
         </p:nvCxnSpPr>
         <p:spPr>
           <a:xfrm>
-            <a:off x="2322000" y="7797600"/>
+            <a:off x="5674800" y="7957620"/>
             <a:ext cx="0" cy="405000"/>
           </a:xfrm>
           <a:prstGeom prst="line">
@@ -7313,7 +7042,7 @@
         </p:nvCxnSpPr>
         <p:spPr>
           <a:xfrm>
-            <a:off x="3942000" y="7797600"/>
+            <a:off x="6753780" y="7957620"/>
             <a:ext cx="0" cy="405000"/>
           </a:xfrm>
           <a:prstGeom prst="line">
@@ -7349,7 +7078,7 @@
         </p:nvCxnSpPr>
         <p:spPr>
           <a:xfrm>
-            <a:off x="5562000" y="7797600"/>
+            <a:off x="7855620" y="7957620"/>
             <a:ext cx="0" cy="405000"/>
           </a:xfrm>
           <a:prstGeom prst="line">
@@ -7379,551 +7108,6 @@
       </p:cxnSp>
       <p:sp>
         <p:nvSpPr>
-          <p:cNvPr id="77" name="Rounded Rectangle 76"/>
-          <p:cNvSpPr/>
-          <p:nvPr/>
-        </p:nvSpPr>
-        <p:spPr>
-          <a:xfrm>
-            <a:off x="6821738" y="1163201"/>
-            <a:ext cx="1602901" cy="2088000"/>
-          </a:xfrm>
-          <a:prstGeom prst="roundRect">
-            <a:avLst/>
-          </a:prstGeom>
-          <a:solidFill>
-            <a:srgbClr val="FFFFFF"/>
-          </a:solidFill>
-          <a:ln w="12700">
-            <a:solidFill>
-              <a:srgbClr val="8282A0"/>
-            </a:solidFill>
-          </a:ln>
-        </p:spPr>
-        <p:style>
-          <a:lnRef idx="1">
-            <a:schemeClr val="accent1"/>
-          </a:lnRef>
-          <a:fillRef idx="3">
-            <a:schemeClr val="accent1"/>
-          </a:fillRef>
-          <a:effectRef idx="2">
-            <a:schemeClr val="accent1"/>
-          </a:effectRef>
-          <a:fontRef idx="minor">
-            <a:schemeClr val="lt1"/>
-          </a:fontRef>
-        </p:style>
-        <p:txBody>
-          <a:bodyPr wrap="square" lIns="43200" tIns="28800" rIns="43200" bIns="28800" rtlCol="0" anchor="ctr"/>
-          <a:lstStyle/>
-          <a:p>
-            <a:pPr algn="l">
-              <a:spcBef>
-                <a:spcPts val="0"/>
-              </a:spcBef>
-              <a:spcAft>
-                <a:spcPts val="100"/>
-              </a:spcAft>
-            </a:pPr>
-            <a:r>
-              <a:rPr sz="900" b="1" i="0" dirty="0">
-                <a:solidFill>
-                  <a:srgbClr val="000000"/>
-                </a:solidFill>
-                <a:latin typeface="Calibri"/>
-              </a:rPr>
-              <a:t>Equations:</a:t>
-            </a:r>
-          </a:p>
-          <a:p>
-            <a:pPr algn="l">
-              <a:spcBef>
-                <a:spcPts val="0"/>
-              </a:spcBef>
-              <a:spcAft>
-                <a:spcPts val="100"/>
-              </a:spcAft>
-            </a:pPr>
-            <a:r>
-              <a:rPr sz="900" b="0" i="0" dirty="0">
-                <a:solidFill>
-                  <a:srgbClr val="000000"/>
-                </a:solidFill>
-                <a:latin typeface="Calibri"/>
-              </a:rPr>
-              <a:t>TUᵢⱼ  =  Cᵢⱼ  /  LC̃₅₀,ᵢ</a:t>
-            </a:r>
-          </a:p>
-          <a:p>
-            <a:pPr algn="l">
-              <a:spcBef>
-                <a:spcPts val="0"/>
-              </a:spcBef>
-              <a:spcAft>
-                <a:spcPts val="100"/>
-              </a:spcAft>
-            </a:pPr>
-            <a:r>
-              <a:rPr sz="900" b="0" i="0" dirty="0">
-                <a:solidFill>
-                  <a:srgbClr val="000000"/>
-                </a:solidFill>
-                <a:latin typeface="Calibri"/>
-              </a:rPr>
-              <a:t>Cᵢⱼ = conc. of compound </a:t>
-            </a:r>
-            <a:r>
-              <a:rPr sz="900" b="0" i="0" dirty="0" err="1">
-                <a:solidFill>
-                  <a:srgbClr val="000000"/>
-                </a:solidFill>
-                <a:latin typeface="Calibri"/>
-              </a:rPr>
-              <a:t>i</a:t>
-            </a:r>
-            <a:r>
-              <a:rPr sz="900" b="0" i="0" dirty="0">
-                <a:solidFill>
-                  <a:srgbClr val="000000"/>
-                </a:solidFill>
-                <a:latin typeface="Calibri"/>
-              </a:rPr>
-              <a:t>, sample j </a:t>
-            </a:r>
-            <a:br>
-              <a:rPr lang="en-US" sz="900" b="0" i="0" dirty="0">
-                <a:solidFill>
-                  <a:srgbClr val="000000"/>
-                </a:solidFill>
-                <a:latin typeface="Calibri"/>
-              </a:rPr>
-            </a:br>
-            <a:r>
-              <a:rPr sz="900" b="0" i="0" dirty="0">
-                <a:solidFill>
-                  <a:srgbClr val="000000"/>
-                </a:solidFill>
-                <a:latin typeface="Calibri"/>
-              </a:rPr>
-              <a:t>LC̃₅₀,ᵢ = median(LC₅₀/EC₅₀)</a:t>
-            </a:r>
-          </a:p>
-          <a:p>
-            <a:pPr algn="l">
-              <a:spcBef>
-                <a:spcPts val="0"/>
-              </a:spcBef>
-              <a:spcAft>
-                <a:spcPts val="100"/>
-              </a:spcAft>
-            </a:pPr>
-            <a:r>
-              <a:rPr sz="900" b="0" i="0" dirty="0">
-                <a:solidFill>
-                  <a:srgbClr val="000000"/>
-                </a:solidFill>
-                <a:latin typeface="Calibri"/>
-              </a:rPr>
-              <a:t>compound </a:t>
-            </a:r>
-            <a:r>
-              <a:rPr sz="900" b="0" i="0" dirty="0" err="1">
-                <a:solidFill>
-                  <a:srgbClr val="000000"/>
-                </a:solidFill>
-                <a:latin typeface="Calibri"/>
-              </a:rPr>
-              <a:t>i</a:t>
-            </a:r>
-            <a:r>
-              <a:rPr sz="900" b="0" i="0" dirty="0">
-                <a:solidFill>
-                  <a:srgbClr val="000000"/>
-                </a:solidFill>
-                <a:latin typeface="Calibri"/>
-              </a:rPr>
-              <a:t>, per taxon</a:t>
-            </a:r>
-            <a:br>
-              <a:rPr lang="en-US" sz="900" b="0" i="0" dirty="0">
-                <a:solidFill>
-                  <a:srgbClr val="000000"/>
-                </a:solidFill>
-                <a:latin typeface="Calibri"/>
-              </a:rPr>
-            </a:br>
-            <a:endParaRPr sz="900" b="0" i="0" dirty="0">
-              <a:solidFill>
-                <a:srgbClr val="000000"/>
-              </a:solidFill>
-              <a:latin typeface="Calibri"/>
-            </a:endParaRPr>
-          </a:p>
-          <a:p>
-            <a:pPr algn="l">
-              <a:spcBef>
-                <a:spcPts val="0"/>
-              </a:spcBef>
-              <a:spcAft>
-                <a:spcPts val="100"/>
-              </a:spcAft>
-            </a:pPr>
-            <a:r>
-              <a:rPr sz="900" b="0" i="0" dirty="0">
-                <a:solidFill>
-                  <a:srgbClr val="000000"/>
-                </a:solidFill>
-                <a:latin typeface="Calibri"/>
-              </a:rPr>
-              <a:t>PTIⱼ  =  Σᵢ  TUᵢⱼ</a:t>
-            </a:r>
-          </a:p>
-          <a:p>
-            <a:pPr algn="l">
-              <a:spcBef>
-                <a:spcPts val="0"/>
-              </a:spcBef>
-              <a:spcAft>
-                <a:spcPts val="100"/>
-              </a:spcAft>
-            </a:pPr>
-            <a:endParaRPr sz="900" b="0" i="0" dirty="0">
-              <a:solidFill>
-                <a:srgbClr val="000000"/>
-              </a:solidFill>
-              <a:latin typeface="Calibri"/>
-            </a:endParaRPr>
-          </a:p>
-          <a:p>
-            <a:pPr algn="l">
-              <a:spcBef>
-                <a:spcPts val="0"/>
-              </a:spcBef>
-              <a:spcAft>
-                <a:spcPts val="100"/>
-              </a:spcAft>
-            </a:pPr>
-            <a:r>
-              <a:rPr sz="900" b="1" i="0" dirty="0">
-                <a:solidFill>
-                  <a:srgbClr val="000000"/>
-                </a:solidFill>
-                <a:latin typeface="Calibri"/>
-              </a:rPr>
-              <a:t>Risk thresholds:</a:t>
-            </a:r>
-          </a:p>
-          <a:p>
-            <a:pPr algn="l">
-              <a:spcBef>
-                <a:spcPts val="0"/>
-              </a:spcBef>
-              <a:spcAft>
-                <a:spcPts val="100"/>
-              </a:spcAft>
-            </a:pPr>
-            <a:r>
-              <a:rPr sz="900" b="0" i="0" dirty="0">
-                <a:solidFill>
-                  <a:srgbClr val="C82828"/>
-                </a:solidFill>
-                <a:latin typeface="Calibri"/>
-              </a:rPr>
-              <a:t>• PTI ≥ 1.0: Acute risk</a:t>
-            </a:r>
-          </a:p>
-          <a:p>
-            <a:pPr algn="l">
-              <a:spcBef>
-                <a:spcPts val="0"/>
-              </a:spcBef>
-              <a:spcAft>
-                <a:spcPts val="100"/>
-              </a:spcAft>
-            </a:pPr>
-            <a:r>
-              <a:rPr sz="900" b="0" i="0" dirty="0">
-                <a:solidFill>
-                  <a:srgbClr val="D28C00"/>
-                </a:solidFill>
-                <a:latin typeface="Calibri"/>
-              </a:rPr>
-              <a:t>• PTI 0.1–1.0: Chronic risk</a:t>
-            </a:r>
-          </a:p>
-          <a:p>
-            <a:pPr algn="l">
-              <a:spcBef>
-                <a:spcPts val="0"/>
-              </a:spcBef>
-              <a:spcAft>
-                <a:spcPts val="100"/>
-              </a:spcAft>
-            </a:pPr>
-            <a:r>
-              <a:rPr sz="900" b="0" i="0" dirty="0">
-                <a:solidFill>
-                  <a:srgbClr val="289632"/>
-                </a:solidFill>
-                <a:latin typeface="Calibri"/>
-              </a:rPr>
-              <a:t>• PTI &lt; 0.1: Low risk</a:t>
-            </a:r>
-          </a:p>
-        </p:txBody>
-      </p:sp>
-      <p:sp>
-        <p:nvSpPr>
-          <p:cNvPr id="78" name="Rounded Rectangle 77"/>
-          <p:cNvSpPr/>
-          <p:nvPr/>
-        </p:nvSpPr>
-        <p:spPr>
-          <a:xfrm>
-            <a:off x="6821738" y="3339686"/>
-            <a:ext cx="1602901" cy="1620000"/>
-          </a:xfrm>
-          <a:prstGeom prst="roundRect">
-            <a:avLst/>
-          </a:prstGeom>
-          <a:solidFill>
-            <a:srgbClr val="FFFFFF"/>
-          </a:solidFill>
-          <a:ln w="12700">
-            <a:solidFill>
-              <a:srgbClr val="8282A0"/>
-            </a:solidFill>
-          </a:ln>
-        </p:spPr>
-        <p:style>
-          <a:lnRef idx="1">
-            <a:schemeClr val="accent1"/>
-          </a:lnRef>
-          <a:fillRef idx="3">
-            <a:schemeClr val="accent1"/>
-          </a:fillRef>
-          <a:effectRef idx="2">
-            <a:schemeClr val="accent1"/>
-          </a:effectRef>
-          <a:fontRef idx="minor">
-            <a:schemeClr val="lt1"/>
-          </a:fontRef>
-        </p:style>
-        <p:txBody>
-          <a:bodyPr wrap="square" lIns="43200" tIns="28800" rIns="43200" bIns="28800" rtlCol="0" anchor="ctr"/>
-          <a:lstStyle/>
-          <a:p>
-            <a:pPr algn="l">
-              <a:spcBef>
-                <a:spcPts val="0"/>
-              </a:spcBef>
-              <a:spcAft>
-                <a:spcPts val="100"/>
-              </a:spcAft>
-            </a:pPr>
-            <a:r>
-              <a:rPr sz="900" b="1" i="0" dirty="0">
-                <a:solidFill>
-                  <a:srgbClr val="000000"/>
-                </a:solidFill>
-                <a:latin typeface="Calibri"/>
-              </a:rPr>
-              <a:t>Symbol</a:t>
-            </a:r>
-            <a:r>
-              <a:rPr lang="en-US" sz="900" b="1" i="0" dirty="0">
-                <a:solidFill>
-                  <a:srgbClr val="000000"/>
-                </a:solidFill>
-                <a:latin typeface="Calibri"/>
-              </a:rPr>
-              <a:t>s</a:t>
-            </a:r>
-            <a:r>
-              <a:rPr sz="900" b="1" i="0" dirty="0">
-                <a:solidFill>
-                  <a:srgbClr val="000000"/>
-                </a:solidFill>
-                <a:latin typeface="Calibri"/>
-              </a:rPr>
-              <a:t>:</a:t>
-            </a:r>
-          </a:p>
-          <a:p>
-            <a:pPr algn="l">
-              <a:spcBef>
-                <a:spcPts val="0"/>
-              </a:spcBef>
-              <a:spcAft>
-                <a:spcPts val="100"/>
-              </a:spcAft>
-            </a:pPr>
-            <a:r>
-              <a:rPr sz="900" b="0" i="0" dirty="0">
-                <a:solidFill>
-                  <a:srgbClr val="000000"/>
-                </a:solidFill>
-                <a:latin typeface="Calibri"/>
-              </a:rPr>
-              <a:t>Parallelogram: data input</a:t>
-            </a:r>
-          </a:p>
-          <a:p>
-            <a:pPr algn="l">
-              <a:spcBef>
-                <a:spcPts val="0"/>
-              </a:spcBef>
-              <a:spcAft>
-                <a:spcPts val="100"/>
-              </a:spcAft>
-            </a:pPr>
-            <a:r>
-              <a:rPr sz="900" b="0" i="0" dirty="0">
-                <a:solidFill>
-                  <a:srgbClr val="000000"/>
-                </a:solidFill>
-                <a:latin typeface="Calibri"/>
-              </a:rPr>
-              <a:t>Rectangle: processing step</a:t>
-            </a:r>
-          </a:p>
-          <a:p>
-            <a:pPr algn="l">
-              <a:spcBef>
-                <a:spcPts val="0"/>
-              </a:spcBef>
-              <a:spcAft>
-                <a:spcPts val="100"/>
-              </a:spcAft>
-            </a:pPr>
-            <a:r>
-              <a:rPr sz="900" b="0" i="0" dirty="0">
-                <a:solidFill>
-                  <a:srgbClr val="000000"/>
-                </a:solidFill>
-                <a:latin typeface="Calibri"/>
-              </a:rPr>
-              <a:t>Cylinder: database / file store</a:t>
-            </a:r>
-          </a:p>
-          <a:p>
-            <a:pPr algn="l">
-              <a:spcBef>
-                <a:spcPts val="0"/>
-              </a:spcBef>
-              <a:spcAft>
-                <a:spcPts val="100"/>
-              </a:spcAft>
-            </a:pPr>
-            <a:r>
-              <a:rPr sz="900" b="0" i="0" dirty="0">
-                <a:solidFill>
-                  <a:srgbClr val="000000"/>
-                </a:solidFill>
-                <a:latin typeface="Calibri"/>
-              </a:rPr>
-              <a:t>Diamond: decision point</a:t>
-            </a:r>
-          </a:p>
-          <a:p>
-            <a:pPr algn="l">
-              <a:spcBef>
-                <a:spcPts val="0"/>
-              </a:spcBef>
-              <a:spcAft>
-                <a:spcPts val="100"/>
-              </a:spcAft>
-            </a:pPr>
-            <a:r>
-              <a:rPr sz="900" b="1" i="0" dirty="0">
-                <a:solidFill>
-                  <a:srgbClr val="000000"/>
-                </a:solidFill>
-                <a:latin typeface="Calibri"/>
-              </a:rPr>
-              <a:t>Taxonomic </a:t>
-            </a:r>
-            <a:r>
-              <a:rPr sz="900" b="1" i="0" dirty="0" err="1">
-                <a:solidFill>
-                  <a:srgbClr val="000000"/>
-                </a:solidFill>
-                <a:latin typeface="Calibri"/>
-              </a:rPr>
-              <a:t>colour</a:t>
-            </a:r>
-            <a:r>
-              <a:rPr sz="900" b="1" i="0" dirty="0">
-                <a:solidFill>
-                  <a:srgbClr val="000000"/>
-                </a:solidFill>
-                <a:latin typeface="Calibri"/>
-              </a:rPr>
-              <a:t> coding:</a:t>
-            </a:r>
-          </a:p>
-          <a:p>
-            <a:pPr algn="l">
-              <a:spcBef>
-                <a:spcPts val="0"/>
-              </a:spcBef>
-              <a:spcAft>
-                <a:spcPts val="100"/>
-              </a:spcAft>
-            </a:pPr>
-            <a:r>
-              <a:rPr sz="900" b="0" i="0" dirty="0">
-                <a:solidFill>
-                  <a:srgbClr val="1E6E14"/>
-                </a:solidFill>
-                <a:latin typeface="Calibri"/>
-              </a:rPr>
-              <a:t>■  Algae</a:t>
-            </a:r>
-          </a:p>
-          <a:p>
-            <a:pPr algn="l">
-              <a:spcBef>
-                <a:spcPts val="0"/>
-              </a:spcBef>
-              <a:spcAft>
-                <a:spcPts val="100"/>
-              </a:spcAft>
-            </a:pPr>
-            <a:r>
-              <a:rPr sz="900" b="0" i="0" dirty="0">
-                <a:solidFill>
-                  <a:srgbClr val="A05000"/>
-                </a:solidFill>
-                <a:latin typeface="Calibri"/>
-              </a:rPr>
-              <a:t>■  Crustaceans</a:t>
-            </a:r>
-          </a:p>
-          <a:p>
-            <a:pPr algn="l">
-              <a:spcBef>
-                <a:spcPts val="0"/>
-              </a:spcBef>
-              <a:spcAft>
-                <a:spcPts val="100"/>
-              </a:spcAft>
-            </a:pPr>
-            <a:r>
-              <a:rPr sz="900" b="0" i="0" dirty="0">
-                <a:solidFill>
-                  <a:srgbClr val="1446A0"/>
-                </a:solidFill>
-                <a:latin typeface="Calibri"/>
-              </a:rPr>
-              <a:t>■  Fish</a:t>
-            </a:r>
-          </a:p>
-        </p:txBody>
-      </p:sp>
-      <p:sp>
-        <p:nvSpPr>
           <p:cNvPr id="79" name="TextBox 78"/>
           <p:cNvSpPr txBox="1"/>
           <p:nvPr/>
@@ -7960,50 +7144,6 @@
           </a:p>
         </p:txBody>
       </p:sp>
-      <p:cxnSp>
-        <p:nvCxnSpPr>
-          <p:cNvPr id="104" name="Connector 61">
-            <a:extLst>
-              <a:ext uri="{FF2B5EF4-FFF2-40B4-BE49-F238E27FC236}">
-                <a16:creationId xmlns:a16="http://schemas.microsoft.com/office/drawing/2014/main" id="{7ABAF910-08F9-42AB-BA24-C3C8309E9610}"/>
-              </a:ext>
-            </a:extLst>
-          </p:cNvPr>
-          <p:cNvCxnSpPr>
-            <a:cxnSpLocks/>
-          </p:cNvCxnSpPr>
-          <p:nvPr/>
-        </p:nvCxnSpPr>
-        <p:spPr>
-          <a:xfrm flipH="1">
-            <a:off x="3820886" y="5767811"/>
-            <a:ext cx="0" cy="482521"/>
-          </a:xfrm>
-          <a:prstGeom prst="line">
-            <a:avLst/>
-          </a:prstGeom>
-          <a:ln w="15240">
-            <a:solidFill>
-              <a:schemeClr val="tx1"/>
-            </a:solidFill>
-            <a:tailEnd type="triangle"/>
-          </a:ln>
-        </p:spPr>
-        <p:style>
-          <a:lnRef idx="2">
-            <a:schemeClr val="accent1"/>
-          </a:lnRef>
-          <a:fillRef idx="0">
-            <a:schemeClr val="accent1"/>
-          </a:fillRef>
-          <a:effectRef idx="1">
-            <a:schemeClr val="accent1"/>
-          </a:effectRef>
-          <a:fontRef idx="minor">
-            <a:schemeClr val="tx1"/>
-          </a:fontRef>
-        </p:style>
-      </p:cxnSp>
       <p:sp>
         <p:nvSpPr>
           <p:cNvPr id="107" name="חץ: למטה 106">
@@ -8018,8 +7158,2262 @@
         </p:nvSpPr>
         <p:spPr>
           <a:xfrm>
-            <a:off x="3820886" y="8786759"/>
-            <a:ext cx="324394" cy="172500"/>
+            <a:off x="5603965" y="8946779"/>
+            <a:ext cx="360455" cy="172500"/>
+          </a:xfrm>
+          <a:prstGeom prst="downArrow">
+            <a:avLst/>
+          </a:prstGeom>
+          <a:gradFill>
+            <a:gsLst>
+              <a:gs pos="0">
+                <a:schemeClr val="tx1">
+                  <a:lumMod val="50000"/>
+                  <a:lumOff val="50000"/>
+                </a:schemeClr>
+              </a:gs>
+              <a:gs pos="100000">
+                <a:schemeClr val="tx1">
+                  <a:lumMod val="50000"/>
+                  <a:lumOff val="50000"/>
+                </a:schemeClr>
+              </a:gs>
+            </a:gsLst>
+          </a:gradFill>
+        </p:spPr>
+        <p:style>
+          <a:lnRef idx="1">
+            <a:schemeClr val="accent1"/>
+          </a:lnRef>
+          <a:fillRef idx="3">
+            <a:schemeClr val="accent1"/>
+          </a:fillRef>
+          <a:effectRef idx="2">
+            <a:schemeClr val="accent1"/>
+          </a:effectRef>
+          <a:fontRef idx="minor">
+            <a:schemeClr val="lt1"/>
+          </a:fontRef>
+        </p:style>
+        <p:txBody>
+          <a:bodyPr rtlCol="0" anchor="ctr"/>
+          <a:lstStyle/>
+          <a:p>
+            <a:pPr algn="ctr"/>
+            <a:endParaRPr lang="LID4096"/>
+          </a:p>
+        </p:txBody>
+      </p:sp>
+      <p:cxnSp>
+        <p:nvCxnSpPr>
+          <p:cNvPr id="48" name="Connector 47"/>
+          <p:cNvCxnSpPr>
+            <a:cxnSpLocks/>
+          </p:cNvCxnSpPr>
+          <p:nvPr/>
+        </p:nvCxnSpPr>
+        <p:spPr>
+          <a:xfrm flipH="1">
+            <a:off x="6618900" y="3587460"/>
+            <a:ext cx="504000" cy="0"/>
+          </a:xfrm>
+          <a:prstGeom prst="line">
+            <a:avLst/>
+          </a:prstGeom>
+          <a:ln w="15240">
+            <a:solidFill>
+              <a:srgbClr val="8282A0"/>
+            </a:solidFill>
+            <a:prstDash val="dash"/>
+            <a:headEnd type="triangle" w="med" len="med"/>
+            <a:tailEnd type="triangle" w="med" len="med"/>
+          </a:ln>
+        </p:spPr>
+        <p:style>
+          <a:lnRef idx="2">
+            <a:schemeClr val="accent1"/>
+          </a:lnRef>
+          <a:fillRef idx="0">
+            <a:schemeClr val="accent1"/>
+          </a:fillRef>
+          <a:effectRef idx="1">
+            <a:schemeClr val="accent1"/>
+          </a:effectRef>
+          <a:fontRef idx="minor">
+            <a:schemeClr val="tx1"/>
+          </a:fontRef>
+        </p:style>
+      </p:cxnSp>
+      <p:sp>
+        <p:nvSpPr>
+          <p:cNvPr id="77" name="Rounded Rectangle 14">
+            <a:extLst>
+              <a:ext uri="{FF2B5EF4-FFF2-40B4-BE49-F238E27FC236}">
+                <a16:creationId xmlns:a16="http://schemas.microsoft.com/office/drawing/2014/main" id="{A8373354-EE2C-9231-8C22-01E3A091CABF}"/>
+              </a:ext>
+            </a:extLst>
+          </p:cNvPr>
+          <p:cNvSpPr/>
+          <p:nvPr/>
+        </p:nvSpPr>
+        <p:spPr>
+          <a:xfrm>
+            <a:off x="2148599" y="1732320"/>
+            <a:ext cx="2188815" cy="432000"/>
+          </a:xfrm>
+          <a:prstGeom prst="roundRect">
+            <a:avLst/>
+          </a:prstGeom>
+          <a:solidFill>
+            <a:srgbClr val="F0F0F5"/>
+          </a:solidFill>
+          <a:ln w="13970">
+            <a:solidFill>
+              <a:srgbClr val="8282A0"/>
+            </a:solidFill>
+          </a:ln>
+        </p:spPr>
+        <p:style>
+          <a:lnRef idx="1">
+            <a:schemeClr val="accent1"/>
+          </a:lnRef>
+          <a:fillRef idx="3">
+            <a:schemeClr val="accent1"/>
+          </a:fillRef>
+          <a:effectRef idx="2">
+            <a:schemeClr val="accent1"/>
+          </a:effectRef>
+          <a:fontRef idx="minor">
+            <a:schemeClr val="lt1"/>
+          </a:fontRef>
+        </p:style>
+        <p:txBody>
+          <a:bodyPr wrap="square" lIns="21600" tIns="14400" rIns="21600" bIns="14400" rtlCol="0" anchor="ctr"/>
+          <a:lstStyle/>
+          <a:p>
+            <a:pPr algn="ctr">
+              <a:spcBef>
+                <a:spcPts val="0"/>
+              </a:spcBef>
+              <a:spcAft>
+                <a:spcPts val="0"/>
+              </a:spcAft>
+            </a:pPr>
+            <a:r>
+              <a:rPr lang="en-US" sz="900" b="1" i="0" dirty="0">
+                <a:solidFill>
+                  <a:srgbClr val="000000"/>
+                </a:solidFill>
+                <a:latin typeface="Calibri"/>
+              </a:rPr>
+              <a:t>Compound names</a:t>
+            </a:r>
+          </a:p>
+          <a:p>
+            <a:pPr algn="ctr">
+              <a:spcBef>
+                <a:spcPts val="0"/>
+              </a:spcBef>
+              <a:spcAft>
+                <a:spcPts val="0"/>
+              </a:spcAft>
+            </a:pPr>
+            <a:r>
+              <a:rPr lang="en-US" sz="900" dirty="0">
+                <a:solidFill>
+                  <a:srgbClr val="000000"/>
+                </a:solidFill>
+                <a:latin typeface="Calibri"/>
+              </a:rPr>
+              <a:t>Initial sample data / users additional compounds</a:t>
+            </a:r>
+            <a:endParaRPr sz="900" i="0" dirty="0">
+              <a:solidFill>
+                <a:srgbClr val="000000"/>
+              </a:solidFill>
+              <a:latin typeface="Calibri"/>
+            </a:endParaRPr>
+          </a:p>
+        </p:txBody>
+      </p:sp>
+      <p:sp>
+        <p:nvSpPr>
+          <p:cNvPr id="81" name="Can 15">
+            <a:extLst>
+              <a:ext uri="{FF2B5EF4-FFF2-40B4-BE49-F238E27FC236}">
+                <a16:creationId xmlns:a16="http://schemas.microsoft.com/office/drawing/2014/main" id="{5AEAC6FA-146D-1FE9-CD81-F9EC53C24D91}"/>
+              </a:ext>
+            </a:extLst>
+          </p:cNvPr>
+          <p:cNvSpPr/>
+          <p:nvPr/>
+        </p:nvSpPr>
+        <p:spPr>
+          <a:xfrm>
+            <a:off x="2159220" y="2380984"/>
+            <a:ext cx="873538" cy="616316"/>
+          </a:xfrm>
+          <a:prstGeom prst="can">
+            <a:avLst/>
+          </a:prstGeom>
+          <a:solidFill>
+            <a:srgbClr val="EBE1FF"/>
+          </a:solidFill>
+          <a:ln w="13970">
+            <a:solidFill>
+              <a:srgbClr val="7850C8"/>
+            </a:solidFill>
+          </a:ln>
+        </p:spPr>
+        <p:style>
+          <a:lnRef idx="1">
+            <a:schemeClr val="accent1"/>
+          </a:lnRef>
+          <a:fillRef idx="3">
+            <a:schemeClr val="accent1"/>
+          </a:fillRef>
+          <a:effectRef idx="2">
+            <a:schemeClr val="accent1"/>
+          </a:effectRef>
+          <a:fontRef idx="minor">
+            <a:schemeClr val="lt1"/>
+          </a:fontRef>
+        </p:style>
+        <p:txBody>
+          <a:bodyPr wrap="square" lIns="21600" tIns="14400" rIns="21600" bIns="14400" rtlCol="0" anchor="ctr"/>
+          <a:lstStyle/>
+          <a:p>
+            <a:pPr algn="ctr">
+              <a:spcBef>
+                <a:spcPts val="0"/>
+              </a:spcBef>
+              <a:spcAft>
+                <a:spcPts val="0"/>
+              </a:spcAft>
+            </a:pPr>
+            <a:r>
+              <a:rPr lang="en-US" sz="900" dirty="0">
+                <a:solidFill>
+                  <a:srgbClr val="000000"/>
+                </a:solidFill>
+                <a:latin typeface="Calibri"/>
+              </a:rPr>
+              <a:t>DSSTOX CASRNs matching</a:t>
+            </a:r>
+            <a:r>
+              <a:rPr lang="en-US" sz="900" b="0" i="0" baseline="-25000" dirty="0">
+                <a:solidFill>
+                  <a:srgbClr val="000000"/>
+                </a:solidFill>
+                <a:latin typeface="Calibri"/>
+              </a:rPr>
+              <a:t> </a:t>
+            </a:r>
+            <a:endParaRPr sz="900" b="0" i="0" baseline="-25000" dirty="0">
+              <a:solidFill>
+                <a:srgbClr val="000000"/>
+              </a:solidFill>
+              <a:latin typeface="Calibri"/>
+            </a:endParaRPr>
+          </a:p>
+        </p:txBody>
+      </p:sp>
+      <p:sp>
+        <p:nvSpPr>
+          <p:cNvPr id="82" name="Rounded Rectangle 14">
+            <a:extLst>
+              <a:ext uri="{FF2B5EF4-FFF2-40B4-BE49-F238E27FC236}">
+                <a16:creationId xmlns:a16="http://schemas.microsoft.com/office/drawing/2014/main" id="{A53CFD35-17C7-D48A-A4D6-A1CC320B439E}"/>
+              </a:ext>
+            </a:extLst>
+          </p:cNvPr>
+          <p:cNvSpPr/>
+          <p:nvPr/>
+        </p:nvSpPr>
+        <p:spPr>
+          <a:xfrm>
+            <a:off x="3247847" y="2380984"/>
+            <a:ext cx="1085936" cy="582113"/>
+          </a:xfrm>
+          <a:prstGeom prst="roundRect">
+            <a:avLst/>
+          </a:prstGeom>
+          <a:solidFill>
+            <a:srgbClr val="F0F0F5"/>
+          </a:solidFill>
+          <a:ln w="13970">
+            <a:solidFill>
+              <a:srgbClr val="8282A0"/>
+            </a:solidFill>
+          </a:ln>
+        </p:spPr>
+        <p:style>
+          <a:lnRef idx="1">
+            <a:schemeClr val="accent1"/>
+          </a:lnRef>
+          <a:fillRef idx="3">
+            <a:schemeClr val="accent1"/>
+          </a:fillRef>
+          <a:effectRef idx="2">
+            <a:schemeClr val="accent1"/>
+          </a:effectRef>
+          <a:fontRef idx="minor">
+            <a:schemeClr val="lt1"/>
+          </a:fontRef>
+        </p:style>
+        <p:txBody>
+          <a:bodyPr wrap="square" lIns="21600" tIns="14400" rIns="21600" bIns="14400" rtlCol="0" anchor="ctr"/>
+          <a:lstStyle/>
+          <a:p>
+            <a:pPr algn="ctr">
+              <a:spcBef>
+                <a:spcPts val="0"/>
+              </a:spcBef>
+              <a:spcAft>
+                <a:spcPts val="0"/>
+              </a:spcAft>
+            </a:pPr>
+            <a:r>
+              <a:rPr lang="en-US" sz="900" b="1" i="0" dirty="0">
+                <a:solidFill>
+                  <a:srgbClr val="000000"/>
+                </a:solidFill>
+                <a:latin typeface="Calibri"/>
+              </a:rPr>
+              <a:t>PubChem REST API</a:t>
+            </a:r>
+          </a:p>
+          <a:p>
+            <a:pPr algn="ctr">
+              <a:spcBef>
+                <a:spcPts val="0"/>
+              </a:spcBef>
+              <a:spcAft>
+                <a:spcPts val="0"/>
+              </a:spcAft>
+            </a:pPr>
+            <a:r>
+              <a:rPr lang="en-US" sz="900" dirty="0">
+                <a:solidFill>
+                  <a:srgbClr val="000000"/>
+                </a:solidFill>
+                <a:latin typeface="Calibri"/>
+              </a:rPr>
+              <a:t>CASRNs matching</a:t>
+            </a:r>
+            <a:endParaRPr lang="en-US" sz="900" i="0" dirty="0">
+              <a:solidFill>
+                <a:srgbClr val="000000"/>
+              </a:solidFill>
+              <a:latin typeface="Calibri"/>
+            </a:endParaRPr>
+          </a:p>
+        </p:txBody>
+      </p:sp>
+      <p:cxnSp>
+        <p:nvCxnSpPr>
+          <p:cNvPr id="83" name="Connector 41">
+            <a:extLst>
+              <a:ext uri="{FF2B5EF4-FFF2-40B4-BE49-F238E27FC236}">
+                <a16:creationId xmlns:a16="http://schemas.microsoft.com/office/drawing/2014/main" id="{E0776502-1512-D04E-81D1-5C70EBCAEBD4}"/>
+              </a:ext>
+            </a:extLst>
+          </p:cNvPr>
+          <p:cNvCxnSpPr>
+            <a:cxnSpLocks/>
+            <a:endCxn id="81" idx="1"/>
+          </p:cNvCxnSpPr>
+          <p:nvPr/>
+        </p:nvCxnSpPr>
+        <p:spPr>
+          <a:xfrm flipH="1">
+            <a:off x="2595989" y="2165579"/>
+            <a:ext cx="557971" cy="215405"/>
+          </a:xfrm>
+          <a:prstGeom prst="line">
+            <a:avLst/>
+          </a:prstGeom>
+          <a:ln w="15240">
+            <a:solidFill>
+              <a:srgbClr val="5B82B9"/>
+            </a:solidFill>
+            <a:tailEnd type="triangle"/>
+          </a:ln>
+        </p:spPr>
+        <p:style>
+          <a:lnRef idx="2">
+            <a:schemeClr val="accent1"/>
+          </a:lnRef>
+          <a:fillRef idx="0">
+            <a:schemeClr val="accent1"/>
+          </a:fillRef>
+          <a:effectRef idx="1">
+            <a:schemeClr val="accent1"/>
+          </a:effectRef>
+          <a:fontRef idx="minor">
+            <a:schemeClr val="tx1"/>
+          </a:fontRef>
+        </p:style>
+      </p:cxnSp>
+      <p:cxnSp>
+        <p:nvCxnSpPr>
+          <p:cNvPr id="85" name="Connector 41">
+            <a:extLst>
+              <a:ext uri="{FF2B5EF4-FFF2-40B4-BE49-F238E27FC236}">
+                <a16:creationId xmlns:a16="http://schemas.microsoft.com/office/drawing/2014/main" id="{CB4D7E6E-D0AA-9327-8629-15538CDF9A68}"/>
+              </a:ext>
+            </a:extLst>
+          </p:cNvPr>
+          <p:cNvCxnSpPr>
+            <a:cxnSpLocks/>
+            <a:endCxn id="82" idx="0"/>
+          </p:cNvCxnSpPr>
+          <p:nvPr/>
+        </p:nvCxnSpPr>
+        <p:spPr>
+          <a:xfrm>
+            <a:off x="3169200" y="2165579"/>
+            <a:ext cx="621615" cy="215405"/>
+          </a:xfrm>
+          <a:prstGeom prst="line">
+            <a:avLst/>
+          </a:prstGeom>
+          <a:ln w="15240">
+            <a:solidFill>
+              <a:srgbClr val="5B82B9"/>
+            </a:solidFill>
+            <a:tailEnd type="triangle"/>
+          </a:ln>
+        </p:spPr>
+        <p:style>
+          <a:lnRef idx="2">
+            <a:schemeClr val="accent1"/>
+          </a:lnRef>
+          <a:fillRef idx="0">
+            <a:schemeClr val="accent1"/>
+          </a:fillRef>
+          <a:effectRef idx="1">
+            <a:schemeClr val="accent1"/>
+          </a:effectRef>
+          <a:fontRef idx="minor">
+            <a:schemeClr val="tx1"/>
+          </a:fontRef>
+        </p:style>
+      </p:cxnSp>
+      <p:sp>
+        <p:nvSpPr>
+          <p:cNvPr id="87" name="Can 19">
+            <a:extLst>
+              <a:ext uri="{FF2B5EF4-FFF2-40B4-BE49-F238E27FC236}">
+                <a16:creationId xmlns:a16="http://schemas.microsoft.com/office/drawing/2014/main" id="{64D564AA-8F9A-5B52-0897-9DA19FB737BB}"/>
+              </a:ext>
+            </a:extLst>
+          </p:cNvPr>
+          <p:cNvSpPr/>
+          <p:nvPr/>
+        </p:nvSpPr>
+        <p:spPr>
+          <a:xfrm>
+            <a:off x="2589039" y="3321852"/>
+            <a:ext cx="1296000" cy="684000"/>
+          </a:xfrm>
+          <a:prstGeom prst="can">
+            <a:avLst/>
+          </a:prstGeom>
+          <a:solidFill>
+            <a:srgbClr val="EBE1FF"/>
+          </a:solidFill>
+          <a:ln w="13970">
+            <a:solidFill>
+              <a:srgbClr val="7850C8"/>
+            </a:solidFill>
+          </a:ln>
+        </p:spPr>
+        <p:style>
+          <a:lnRef idx="1">
+            <a:schemeClr val="accent1"/>
+          </a:lnRef>
+          <a:fillRef idx="3">
+            <a:schemeClr val="accent1"/>
+          </a:fillRef>
+          <a:effectRef idx="2">
+            <a:schemeClr val="accent1"/>
+          </a:effectRef>
+          <a:fontRef idx="minor">
+            <a:schemeClr val="lt1"/>
+          </a:fontRef>
+        </p:style>
+        <p:txBody>
+          <a:bodyPr wrap="square" lIns="21600" tIns="14400" rIns="21600" bIns="14400" rtlCol="0" anchor="ctr"/>
+          <a:lstStyle/>
+          <a:p>
+            <a:pPr algn="ctr">
+              <a:spcBef>
+                <a:spcPts val="0"/>
+              </a:spcBef>
+              <a:spcAft>
+                <a:spcPts val="0"/>
+              </a:spcAft>
+            </a:pPr>
+            <a:r>
+              <a:rPr lang="en-US" sz="900" b="1" dirty="0">
+                <a:solidFill>
+                  <a:srgbClr val="000000"/>
+                </a:solidFill>
+              </a:rPr>
+              <a:t>Internal CASRNs table</a:t>
+            </a:r>
+          </a:p>
+        </p:txBody>
+      </p:sp>
+      <p:cxnSp>
+        <p:nvCxnSpPr>
+          <p:cNvPr id="88" name="Connector 41">
+            <a:extLst>
+              <a:ext uri="{FF2B5EF4-FFF2-40B4-BE49-F238E27FC236}">
+                <a16:creationId xmlns:a16="http://schemas.microsoft.com/office/drawing/2014/main" id="{F630B860-9319-0CF0-C29A-2C02A1CC1392}"/>
+              </a:ext>
+            </a:extLst>
+          </p:cNvPr>
+          <p:cNvCxnSpPr>
+            <a:cxnSpLocks/>
+            <a:endCxn id="87" idx="1"/>
+          </p:cNvCxnSpPr>
+          <p:nvPr/>
+        </p:nvCxnSpPr>
+        <p:spPr>
+          <a:xfrm>
+            <a:off x="2597700" y="3019019"/>
+            <a:ext cx="639339" cy="302833"/>
+          </a:xfrm>
+          <a:prstGeom prst="line">
+            <a:avLst/>
+          </a:prstGeom>
+          <a:ln w="15240">
+            <a:solidFill>
+              <a:srgbClr val="5B82B9"/>
+            </a:solidFill>
+            <a:tailEnd type="triangle"/>
+          </a:ln>
+        </p:spPr>
+        <p:style>
+          <a:lnRef idx="2">
+            <a:schemeClr val="accent1"/>
+          </a:lnRef>
+          <a:fillRef idx="0">
+            <a:schemeClr val="accent1"/>
+          </a:fillRef>
+          <a:effectRef idx="1">
+            <a:schemeClr val="accent1"/>
+          </a:effectRef>
+          <a:fontRef idx="minor">
+            <a:schemeClr val="tx1"/>
+          </a:fontRef>
+        </p:style>
+      </p:cxnSp>
+      <p:cxnSp>
+        <p:nvCxnSpPr>
+          <p:cNvPr id="91" name="Connector 41">
+            <a:extLst>
+              <a:ext uri="{FF2B5EF4-FFF2-40B4-BE49-F238E27FC236}">
+                <a16:creationId xmlns:a16="http://schemas.microsoft.com/office/drawing/2014/main" id="{FEDE9868-2405-50A5-DAF2-C56161047B71}"/>
+              </a:ext>
+            </a:extLst>
+          </p:cNvPr>
+          <p:cNvCxnSpPr>
+            <a:cxnSpLocks/>
+            <a:endCxn id="87" idx="1"/>
+          </p:cNvCxnSpPr>
+          <p:nvPr/>
+        </p:nvCxnSpPr>
+        <p:spPr>
+          <a:xfrm flipH="1">
+            <a:off x="3237039" y="2997300"/>
+            <a:ext cx="618304" cy="324552"/>
+          </a:xfrm>
+          <a:prstGeom prst="line">
+            <a:avLst/>
+          </a:prstGeom>
+          <a:ln w="15240">
+            <a:solidFill>
+              <a:srgbClr val="5B82B9"/>
+            </a:solidFill>
+            <a:tailEnd type="triangle"/>
+          </a:ln>
+        </p:spPr>
+        <p:style>
+          <a:lnRef idx="2">
+            <a:schemeClr val="accent1"/>
+          </a:lnRef>
+          <a:fillRef idx="0">
+            <a:schemeClr val="accent1"/>
+          </a:fillRef>
+          <a:effectRef idx="1">
+            <a:schemeClr val="accent1"/>
+          </a:effectRef>
+          <a:fontRef idx="minor">
+            <a:schemeClr val="tx1"/>
+          </a:fontRef>
+        </p:style>
+      </p:cxnSp>
+      <p:sp>
+        <p:nvSpPr>
+          <p:cNvPr id="94" name="Rounded Rectangle 18">
+            <a:extLst>
+              <a:ext uri="{FF2B5EF4-FFF2-40B4-BE49-F238E27FC236}">
+                <a16:creationId xmlns:a16="http://schemas.microsoft.com/office/drawing/2014/main" id="{B1EFA17C-D2E8-AAC3-0C31-C40AACE9A486}"/>
+              </a:ext>
+            </a:extLst>
+          </p:cNvPr>
+          <p:cNvSpPr/>
+          <p:nvPr/>
+        </p:nvSpPr>
+        <p:spPr>
+          <a:xfrm>
+            <a:off x="2316239" y="5426771"/>
+            <a:ext cx="1584000" cy="627139"/>
+          </a:xfrm>
+          <a:prstGeom prst="roundRect">
+            <a:avLst/>
+          </a:prstGeom>
+          <a:solidFill>
+            <a:srgbClr val="F0F0F5"/>
+          </a:solidFill>
+          <a:ln w="13970">
+            <a:solidFill>
+              <a:srgbClr val="8282A0"/>
+            </a:solidFill>
+          </a:ln>
+        </p:spPr>
+        <p:style>
+          <a:lnRef idx="1">
+            <a:schemeClr val="accent1"/>
+          </a:lnRef>
+          <a:fillRef idx="3">
+            <a:schemeClr val="accent1"/>
+          </a:fillRef>
+          <a:effectRef idx="2">
+            <a:schemeClr val="accent1"/>
+          </a:effectRef>
+          <a:fontRef idx="minor">
+            <a:schemeClr val="lt1"/>
+          </a:fontRef>
+        </p:style>
+        <p:txBody>
+          <a:bodyPr wrap="square" lIns="21600" tIns="14400" rIns="21600" bIns="14400" rtlCol="0" anchor="ctr"/>
+          <a:lstStyle/>
+          <a:p>
+            <a:pPr algn="ctr">
+              <a:spcBef>
+                <a:spcPts val="0"/>
+              </a:spcBef>
+              <a:spcAft>
+                <a:spcPts val="0"/>
+              </a:spcAft>
+            </a:pPr>
+            <a:r>
+              <a:rPr lang="en-US" sz="900" b="1" i="0" dirty="0">
+                <a:solidFill>
+                  <a:srgbClr val="000000"/>
+                </a:solidFill>
+                <a:latin typeface="Calibri"/>
+              </a:rPr>
+              <a:t>National concentration benchmarks</a:t>
+            </a:r>
+            <a:endParaRPr sz="900" b="1" i="0" dirty="0">
+              <a:solidFill>
+                <a:srgbClr val="000000"/>
+              </a:solidFill>
+              <a:latin typeface="Calibri"/>
+            </a:endParaRPr>
+          </a:p>
+        </p:txBody>
+      </p:sp>
+      <p:cxnSp>
+        <p:nvCxnSpPr>
+          <p:cNvPr id="95" name="Connector 45">
+            <a:extLst>
+              <a:ext uri="{FF2B5EF4-FFF2-40B4-BE49-F238E27FC236}">
+                <a16:creationId xmlns:a16="http://schemas.microsoft.com/office/drawing/2014/main" id="{9C54991F-353B-A5E2-3E31-78A8FDCBD82A}"/>
+              </a:ext>
+            </a:extLst>
+          </p:cNvPr>
+          <p:cNvCxnSpPr>
+            <a:cxnSpLocks/>
+            <a:stCxn id="94" idx="1"/>
+            <a:endCxn id="20" idx="4"/>
+          </p:cNvCxnSpPr>
+          <p:nvPr/>
+        </p:nvCxnSpPr>
+        <p:spPr>
+          <a:xfrm flipH="1">
+            <a:off x="1835999" y="5740341"/>
+            <a:ext cx="480240" cy="8319"/>
+          </a:xfrm>
+          <a:prstGeom prst="line">
+            <a:avLst/>
+          </a:prstGeom>
+          <a:ln w="15240">
+            <a:solidFill>
+              <a:srgbClr val="5B82B9"/>
+            </a:solidFill>
+            <a:tailEnd type="triangle"/>
+          </a:ln>
+        </p:spPr>
+        <p:style>
+          <a:lnRef idx="2">
+            <a:schemeClr val="accent1"/>
+          </a:lnRef>
+          <a:fillRef idx="0">
+            <a:schemeClr val="accent1"/>
+          </a:fillRef>
+          <a:effectRef idx="1">
+            <a:schemeClr val="accent1"/>
+          </a:effectRef>
+          <a:fontRef idx="minor">
+            <a:schemeClr val="tx1"/>
+          </a:fontRef>
+        </p:style>
+      </p:cxnSp>
+      <p:sp>
+        <p:nvSpPr>
+          <p:cNvPr id="99" name="Can 19">
+            <a:extLst>
+              <a:ext uri="{FF2B5EF4-FFF2-40B4-BE49-F238E27FC236}">
+                <a16:creationId xmlns:a16="http://schemas.microsoft.com/office/drawing/2014/main" id="{A23A5D3B-318B-BDEC-3D0C-592BA1CC70F0}"/>
+              </a:ext>
+            </a:extLst>
+          </p:cNvPr>
+          <p:cNvSpPr/>
+          <p:nvPr/>
+        </p:nvSpPr>
+        <p:spPr>
+          <a:xfrm>
+            <a:off x="5120641" y="5492699"/>
+            <a:ext cx="1379259" cy="585251"/>
+          </a:xfrm>
+          <a:prstGeom prst="can">
+            <a:avLst/>
+          </a:prstGeom>
+          <a:solidFill>
+            <a:srgbClr val="EBE1FF"/>
+          </a:solidFill>
+          <a:ln w="13970">
+            <a:solidFill>
+              <a:srgbClr val="7850C8"/>
+            </a:solidFill>
+          </a:ln>
+        </p:spPr>
+        <p:style>
+          <a:lnRef idx="1">
+            <a:schemeClr val="accent1"/>
+          </a:lnRef>
+          <a:fillRef idx="3">
+            <a:schemeClr val="accent1"/>
+          </a:fillRef>
+          <a:effectRef idx="2">
+            <a:schemeClr val="accent1"/>
+          </a:effectRef>
+          <a:fontRef idx="minor">
+            <a:schemeClr val="lt1"/>
+          </a:fontRef>
+        </p:style>
+        <p:txBody>
+          <a:bodyPr wrap="square" lIns="21600" tIns="14400" rIns="21600" bIns="14400" rtlCol="0" anchor="ctr"/>
+          <a:lstStyle/>
+          <a:p>
+            <a:pPr algn="ctr"/>
+            <a:r>
+              <a:rPr lang="en-US" sz="900" b="1" dirty="0">
+                <a:solidFill>
+                  <a:srgbClr val="000000"/>
+                </a:solidFill>
+                <a:latin typeface="Calibri"/>
+              </a:rPr>
+              <a:t>refer</a:t>
+            </a:r>
+            <a:r>
+              <a:rPr lang="en-IL" sz="900" b="1" dirty="0">
+                <a:solidFill>
+                  <a:srgbClr val="000000"/>
+                </a:solidFill>
+                <a:latin typeface="Calibri"/>
+              </a:rPr>
+              <a:t> </a:t>
+            </a:r>
+            <a:r>
+              <a:rPr lang="en-US" sz="900" b="1" dirty="0">
+                <a:solidFill>
+                  <a:srgbClr val="000000"/>
+                </a:solidFill>
+                <a:latin typeface="Calibri"/>
+              </a:rPr>
+              <a:t>final reference data</a:t>
+            </a:r>
+            <a:endParaRPr lang="en-IL" sz="900" b="1" dirty="0">
+              <a:solidFill>
+                <a:srgbClr val="000000"/>
+              </a:solidFill>
+              <a:latin typeface="Calibri"/>
+            </a:endParaRPr>
+          </a:p>
+          <a:p>
+            <a:pPr algn="ctr"/>
+            <a:r>
+              <a:rPr lang="en-US" sz="900" dirty="0">
+                <a:solidFill>
+                  <a:srgbClr val="000000"/>
+                </a:solidFill>
+                <a:latin typeface="Calibri"/>
+              </a:rPr>
+              <a:t>And perform calculations</a:t>
+            </a:r>
+            <a:endParaRPr lang="en-IL" sz="900" dirty="0">
+              <a:solidFill>
+                <a:srgbClr val="000000"/>
+              </a:solidFill>
+              <a:latin typeface="Calibri"/>
+            </a:endParaRPr>
+          </a:p>
+        </p:txBody>
+      </p:sp>
+      <p:sp>
+        <p:nvSpPr>
+          <p:cNvPr id="110" name="תיבת טקסט 109">
+            <a:extLst>
+              <a:ext uri="{FF2B5EF4-FFF2-40B4-BE49-F238E27FC236}">
+                <a16:creationId xmlns:a16="http://schemas.microsoft.com/office/drawing/2014/main" id="{8EE61A56-A986-63BE-DEB6-831B666520E0}"/>
+              </a:ext>
+            </a:extLst>
+          </p:cNvPr>
+          <p:cNvSpPr txBox="1"/>
+          <p:nvPr/>
+        </p:nvSpPr>
+        <p:spPr>
+          <a:xfrm>
+            <a:off x="6511269" y="4801931"/>
+            <a:ext cx="377170" cy="184666"/>
+          </a:xfrm>
+          <a:prstGeom prst="rect">
+            <a:avLst/>
+          </a:prstGeom>
+          <a:noFill/>
+        </p:spPr>
+        <p:txBody>
+          <a:bodyPr wrap="square" lIns="0" tIns="0" rIns="0" bIns="0" rtlCol="0">
+            <a:spAutoFit/>
+          </a:bodyPr>
+          <a:lstStyle/>
+          <a:p>
+            <a:r>
+              <a:rPr lang="en-US" sz="1200" dirty="0"/>
+              <a:t>Yes</a:t>
+            </a:r>
+            <a:endParaRPr lang="LID4096" sz="1200" dirty="0"/>
+          </a:p>
+        </p:txBody>
+      </p:sp>
+      <p:sp>
+        <p:nvSpPr>
+          <p:cNvPr id="111" name="תיבת טקסט 110">
+            <a:extLst>
+              <a:ext uri="{FF2B5EF4-FFF2-40B4-BE49-F238E27FC236}">
+                <a16:creationId xmlns:a16="http://schemas.microsoft.com/office/drawing/2014/main" id="{E216CB02-561C-9805-A602-F5F7F884CF9B}"/>
+              </a:ext>
+            </a:extLst>
+          </p:cNvPr>
+          <p:cNvSpPr txBox="1"/>
+          <p:nvPr/>
+        </p:nvSpPr>
+        <p:spPr>
+          <a:xfrm>
+            <a:off x="5360649" y="4573331"/>
+            <a:ext cx="377170" cy="252000"/>
+          </a:xfrm>
+          <a:prstGeom prst="rect">
+            <a:avLst/>
+          </a:prstGeom>
+          <a:noFill/>
+        </p:spPr>
+        <p:txBody>
+          <a:bodyPr wrap="square" lIns="0" tIns="0" rIns="0" bIns="0" rtlCol="0">
+            <a:spAutoFit/>
+          </a:bodyPr>
+          <a:lstStyle/>
+          <a:p>
+            <a:r>
+              <a:rPr lang="en-US" sz="1200" dirty="0"/>
+              <a:t>Yes</a:t>
+            </a:r>
+            <a:endParaRPr lang="LID4096" sz="1200" dirty="0"/>
+          </a:p>
+        </p:txBody>
+      </p:sp>
+      <p:sp>
+        <p:nvSpPr>
+          <p:cNvPr id="112" name="תיבת טקסט 111">
+            <a:extLst>
+              <a:ext uri="{FF2B5EF4-FFF2-40B4-BE49-F238E27FC236}">
+                <a16:creationId xmlns:a16="http://schemas.microsoft.com/office/drawing/2014/main" id="{08C5C090-82E0-B9AB-CB93-72C90565C50C}"/>
+              </a:ext>
+            </a:extLst>
+          </p:cNvPr>
+          <p:cNvSpPr txBox="1"/>
+          <p:nvPr/>
+        </p:nvSpPr>
+        <p:spPr>
+          <a:xfrm>
+            <a:off x="6358869" y="4062791"/>
+            <a:ext cx="377170" cy="184666"/>
+          </a:xfrm>
+          <a:prstGeom prst="rect">
+            <a:avLst/>
+          </a:prstGeom>
+          <a:noFill/>
+        </p:spPr>
+        <p:txBody>
+          <a:bodyPr wrap="square" lIns="0" tIns="0" rIns="0" bIns="0" rtlCol="0">
+            <a:spAutoFit/>
+          </a:bodyPr>
+          <a:lstStyle/>
+          <a:p>
+            <a:r>
+              <a:rPr lang="en-US" sz="1200" dirty="0"/>
+              <a:t>No</a:t>
+            </a:r>
+            <a:endParaRPr lang="LID4096" sz="1200" dirty="0"/>
+          </a:p>
+        </p:txBody>
+      </p:sp>
+      <p:cxnSp>
+        <p:nvCxnSpPr>
+          <p:cNvPr id="113" name="Connector 61">
+            <a:extLst>
+              <a:ext uri="{FF2B5EF4-FFF2-40B4-BE49-F238E27FC236}">
+                <a16:creationId xmlns:a16="http://schemas.microsoft.com/office/drawing/2014/main" id="{8B1A918F-7600-D915-7487-1E15DAAD9558}"/>
+              </a:ext>
+            </a:extLst>
+          </p:cNvPr>
+          <p:cNvCxnSpPr>
+            <a:cxnSpLocks/>
+          </p:cNvCxnSpPr>
+          <p:nvPr/>
+        </p:nvCxnSpPr>
+        <p:spPr>
+          <a:xfrm>
+            <a:off x="5819595" y="5257920"/>
+            <a:ext cx="0" cy="216000"/>
+          </a:xfrm>
+          <a:prstGeom prst="line">
+            <a:avLst/>
+          </a:prstGeom>
+          <a:ln w="15240">
+            <a:solidFill>
+              <a:srgbClr val="3CA05A"/>
+            </a:solidFill>
+            <a:tailEnd type="triangle"/>
+          </a:ln>
+        </p:spPr>
+        <p:style>
+          <a:lnRef idx="2">
+            <a:schemeClr val="accent1"/>
+          </a:lnRef>
+          <a:fillRef idx="0">
+            <a:schemeClr val="accent1"/>
+          </a:fillRef>
+          <a:effectRef idx="1">
+            <a:schemeClr val="accent1"/>
+          </a:effectRef>
+          <a:fontRef idx="minor">
+            <a:schemeClr val="tx1"/>
+          </a:fontRef>
+        </p:style>
+      </p:cxnSp>
+      <p:sp>
+        <p:nvSpPr>
+          <p:cNvPr id="130" name="חץ: למטה 129">
+            <a:extLst>
+              <a:ext uri="{FF2B5EF4-FFF2-40B4-BE49-F238E27FC236}">
+                <a16:creationId xmlns:a16="http://schemas.microsoft.com/office/drawing/2014/main" id="{A9072941-71C4-9A2C-571F-5425D1981C9A}"/>
+              </a:ext>
+            </a:extLst>
+          </p:cNvPr>
+          <p:cNvSpPr/>
+          <p:nvPr/>
+        </p:nvSpPr>
+        <p:spPr>
+          <a:xfrm>
+            <a:off x="6720259" y="6174660"/>
+            <a:ext cx="442752" cy="767514"/>
+          </a:xfrm>
+          <a:prstGeom prst="downArrow">
+            <a:avLst/>
+          </a:prstGeom>
+          <a:solidFill>
+            <a:schemeClr val="bg1">
+              <a:lumMod val="85000"/>
+            </a:schemeClr>
+          </a:solidFill>
+        </p:spPr>
+        <p:style>
+          <a:lnRef idx="1">
+            <a:schemeClr val="accent1"/>
+          </a:lnRef>
+          <a:fillRef idx="3">
+            <a:schemeClr val="accent1"/>
+          </a:fillRef>
+          <a:effectRef idx="2">
+            <a:schemeClr val="accent1"/>
+          </a:effectRef>
+          <a:fontRef idx="minor">
+            <a:schemeClr val="lt1"/>
+          </a:fontRef>
+        </p:style>
+        <p:txBody>
+          <a:bodyPr lIns="0" tIns="0" rIns="0" bIns="0" rtlCol="0" anchor="ctr"/>
+          <a:lstStyle/>
+          <a:p>
+            <a:pPr algn="ctr"/>
+            <a:endParaRPr lang="LID4096" sz="1200" dirty="0">
+              <a:solidFill>
+                <a:schemeClr val="tx1"/>
+              </a:solidFill>
+            </a:endParaRPr>
+          </a:p>
+        </p:txBody>
+      </p:sp>
+      <p:sp>
+        <p:nvSpPr>
+          <p:cNvPr id="131" name="חץ: למטה 130">
+            <a:extLst>
+              <a:ext uri="{FF2B5EF4-FFF2-40B4-BE49-F238E27FC236}">
+                <a16:creationId xmlns:a16="http://schemas.microsoft.com/office/drawing/2014/main" id="{ED74D7CC-5B83-4914-E188-B3D8016C76B4}"/>
+              </a:ext>
+            </a:extLst>
+          </p:cNvPr>
+          <p:cNvSpPr/>
+          <p:nvPr/>
+        </p:nvSpPr>
+        <p:spPr>
+          <a:xfrm>
+            <a:off x="4617139" y="6189900"/>
+            <a:ext cx="699582" cy="767514"/>
+          </a:xfrm>
+          <a:prstGeom prst="downArrow">
+            <a:avLst/>
+          </a:prstGeom>
+          <a:solidFill>
+            <a:schemeClr val="bg1">
+              <a:lumMod val="85000"/>
+            </a:schemeClr>
+          </a:solidFill>
+        </p:spPr>
+        <p:style>
+          <a:lnRef idx="1">
+            <a:schemeClr val="accent1"/>
+          </a:lnRef>
+          <a:fillRef idx="3">
+            <a:schemeClr val="accent1"/>
+          </a:fillRef>
+          <a:effectRef idx="2">
+            <a:schemeClr val="accent1"/>
+          </a:effectRef>
+          <a:fontRef idx="minor">
+            <a:schemeClr val="lt1"/>
+          </a:fontRef>
+        </p:style>
+        <p:txBody>
+          <a:bodyPr lIns="0" tIns="0" rIns="0" bIns="0" rtlCol="0" anchor="ctr"/>
+          <a:lstStyle/>
+          <a:p>
+            <a:pPr algn="ctr"/>
+            <a:endParaRPr lang="LID4096" sz="1200" dirty="0">
+              <a:solidFill>
+                <a:schemeClr val="tx1"/>
+              </a:solidFill>
+            </a:endParaRPr>
+          </a:p>
+        </p:txBody>
+      </p:sp>
+      <p:sp>
+        <p:nvSpPr>
+          <p:cNvPr id="132" name="תיבת טקסט 131">
+            <a:extLst>
+              <a:ext uri="{FF2B5EF4-FFF2-40B4-BE49-F238E27FC236}">
+                <a16:creationId xmlns:a16="http://schemas.microsoft.com/office/drawing/2014/main" id="{B3749BC5-DA53-21D2-70F3-43D2E554C13B}"/>
+              </a:ext>
+            </a:extLst>
+          </p:cNvPr>
+          <p:cNvSpPr txBox="1"/>
+          <p:nvPr/>
+        </p:nvSpPr>
+        <p:spPr>
+          <a:xfrm>
+            <a:off x="7151348" y="6295451"/>
+            <a:ext cx="564051" cy="184666"/>
+          </a:xfrm>
+          <a:prstGeom prst="rect">
+            <a:avLst/>
+          </a:prstGeom>
+          <a:noFill/>
+        </p:spPr>
+        <p:txBody>
+          <a:bodyPr wrap="square" lIns="0" tIns="0" rIns="0" bIns="0" rtlCol="0">
+            <a:spAutoFit/>
+          </a:bodyPr>
+          <a:lstStyle/>
+          <a:p>
+            <a:r>
+              <a:rPr lang="en-US" sz="1200" dirty="0"/>
+              <a:t>Default</a:t>
+            </a:r>
+            <a:endParaRPr lang="LID4096" sz="1200" dirty="0"/>
+          </a:p>
+        </p:txBody>
+      </p:sp>
+      <p:sp>
+        <p:nvSpPr>
+          <p:cNvPr id="133" name="תיבת טקסט 132">
+            <a:extLst>
+              <a:ext uri="{FF2B5EF4-FFF2-40B4-BE49-F238E27FC236}">
+                <a16:creationId xmlns:a16="http://schemas.microsoft.com/office/drawing/2014/main" id="{FF4E82D9-BCAC-570E-8811-80DCFB33D201}"/>
+              </a:ext>
+            </a:extLst>
+          </p:cNvPr>
+          <p:cNvSpPr txBox="1"/>
+          <p:nvPr/>
+        </p:nvSpPr>
+        <p:spPr>
+          <a:xfrm>
+            <a:off x="5170148" y="6287831"/>
+            <a:ext cx="708775" cy="184666"/>
+          </a:xfrm>
+          <a:prstGeom prst="rect">
+            <a:avLst/>
+          </a:prstGeom>
+          <a:noFill/>
+        </p:spPr>
+        <p:txBody>
+          <a:bodyPr wrap="square" lIns="0" tIns="0" rIns="0" bIns="0" rtlCol="0">
+            <a:spAutoFit/>
+          </a:bodyPr>
+          <a:lstStyle/>
+          <a:p>
+            <a:r>
+              <a:rPr lang="en-US" sz="1200" dirty="0"/>
+              <a:t>Advanced</a:t>
+            </a:r>
+            <a:endParaRPr lang="LID4096" sz="1200" dirty="0"/>
+          </a:p>
+        </p:txBody>
+      </p:sp>
+      <p:sp>
+        <p:nvSpPr>
+          <p:cNvPr id="134" name="Rectangle 5">
+            <a:extLst>
+              <a:ext uri="{FF2B5EF4-FFF2-40B4-BE49-F238E27FC236}">
+                <a16:creationId xmlns:a16="http://schemas.microsoft.com/office/drawing/2014/main" id="{19D96159-13D3-39A7-9E75-E42C45E0C1A2}"/>
+              </a:ext>
+            </a:extLst>
+          </p:cNvPr>
+          <p:cNvSpPr/>
+          <p:nvPr/>
+        </p:nvSpPr>
+        <p:spPr>
+          <a:xfrm>
+            <a:off x="345600" y="6972654"/>
+            <a:ext cx="4647180" cy="2004605"/>
+          </a:xfrm>
+          <a:prstGeom prst="rect">
+            <a:avLst/>
+          </a:prstGeom>
+          <a:solidFill>
+            <a:srgbClr val="F0F0F5">
+              <a:alpha val="18000"/>
+            </a:srgbClr>
+          </a:solidFill>
+          <a:ln w="17780">
+            <a:solidFill>
+              <a:srgbClr val="8282A0"/>
+            </a:solidFill>
+            <a:prstDash val="dash"/>
+          </a:ln>
+        </p:spPr>
+        <p:style>
+          <a:lnRef idx="1">
+            <a:schemeClr val="accent1"/>
+          </a:lnRef>
+          <a:fillRef idx="3">
+            <a:schemeClr val="accent1"/>
+          </a:fillRef>
+          <a:effectRef idx="2">
+            <a:schemeClr val="accent1"/>
+          </a:effectRef>
+          <a:fontRef idx="minor">
+            <a:schemeClr val="lt1"/>
+          </a:fontRef>
+        </p:style>
+        <p:txBody>
+          <a:bodyPr rtlCol="0" anchor="ctr"/>
+          <a:lstStyle/>
+          <a:p>
+            <a:endParaRPr sz="900"/>
+          </a:p>
+        </p:txBody>
+      </p:sp>
+      <p:sp>
+        <p:nvSpPr>
+          <p:cNvPr id="135" name="Rectangle 6">
+            <a:extLst>
+              <a:ext uri="{FF2B5EF4-FFF2-40B4-BE49-F238E27FC236}">
+                <a16:creationId xmlns:a16="http://schemas.microsoft.com/office/drawing/2014/main" id="{BBF605E8-DFAC-758F-D593-972BB0AE7F2F}"/>
+              </a:ext>
+            </a:extLst>
+          </p:cNvPr>
+          <p:cNvSpPr/>
+          <p:nvPr/>
+        </p:nvSpPr>
+        <p:spPr>
+          <a:xfrm>
+            <a:off x="1609449" y="7215898"/>
+            <a:ext cx="1008000" cy="1668599"/>
+          </a:xfrm>
+          <a:prstGeom prst="rect">
+            <a:avLst/>
+          </a:prstGeom>
+          <a:solidFill>
+            <a:schemeClr val="bg1">
+              <a:lumMod val="85000"/>
+              <a:alpha val="30000"/>
+            </a:schemeClr>
+          </a:solidFill>
+          <a:ln w="15240">
+            <a:solidFill>
+              <a:schemeClr val="tx1">
+                <a:lumMod val="65000"/>
+                <a:lumOff val="35000"/>
+              </a:schemeClr>
+            </a:solidFill>
+          </a:ln>
+        </p:spPr>
+        <p:style>
+          <a:lnRef idx="1">
+            <a:schemeClr val="accent1"/>
+          </a:lnRef>
+          <a:fillRef idx="3">
+            <a:schemeClr val="accent1"/>
+          </a:fillRef>
+          <a:effectRef idx="2">
+            <a:schemeClr val="accent1"/>
+          </a:effectRef>
+          <a:fontRef idx="minor">
+            <a:schemeClr val="lt1"/>
+          </a:fontRef>
+        </p:style>
+        <p:txBody>
+          <a:bodyPr rtlCol="0" anchor="ctr"/>
+          <a:lstStyle/>
+          <a:p>
+            <a:endParaRPr sz="900"/>
+          </a:p>
+        </p:txBody>
+      </p:sp>
+      <p:sp>
+        <p:nvSpPr>
+          <p:cNvPr id="136" name="Rectangle 7">
+            <a:extLst>
+              <a:ext uri="{FF2B5EF4-FFF2-40B4-BE49-F238E27FC236}">
+                <a16:creationId xmlns:a16="http://schemas.microsoft.com/office/drawing/2014/main" id="{9D4E4F93-5B39-114B-BC7F-FD34A76409D1}"/>
+              </a:ext>
+            </a:extLst>
+          </p:cNvPr>
+          <p:cNvSpPr/>
+          <p:nvPr/>
+        </p:nvSpPr>
+        <p:spPr>
+          <a:xfrm>
+            <a:off x="2749388" y="7215898"/>
+            <a:ext cx="1008000" cy="1668599"/>
+          </a:xfrm>
+          <a:prstGeom prst="rect">
+            <a:avLst/>
+          </a:prstGeom>
+          <a:solidFill>
+            <a:schemeClr val="bg1">
+              <a:lumMod val="85000"/>
+              <a:alpha val="30000"/>
+            </a:schemeClr>
+          </a:solidFill>
+          <a:ln w="15240">
+            <a:solidFill>
+              <a:schemeClr val="tx1">
+                <a:lumMod val="65000"/>
+                <a:lumOff val="35000"/>
+              </a:schemeClr>
+            </a:solidFill>
+          </a:ln>
+        </p:spPr>
+        <p:style>
+          <a:lnRef idx="1">
+            <a:schemeClr val="accent1"/>
+          </a:lnRef>
+          <a:fillRef idx="3">
+            <a:schemeClr val="accent1"/>
+          </a:fillRef>
+          <a:effectRef idx="2">
+            <a:schemeClr val="accent1"/>
+          </a:effectRef>
+          <a:fontRef idx="minor">
+            <a:schemeClr val="lt1"/>
+          </a:fontRef>
+        </p:style>
+        <p:txBody>
+          <a:bodyPr rtlCol="0" anchor="ctr"/>
+          <a:lstStyle/>
+          <a:p>
+            <a:endParaRPr sz="900"/>
+          </a:p>
+        </p:txBody>
+      </p:sp>
+      <p:sp>
+        <p:nvSpPr>
+          <p:cNvPr id="137" name="Rectangle 8">
+            <a:extLst>
+              <a:ext uri="{FF2B5EF4-FFF2-40B4-BE49-F238E27FC236}">
+                <a16:creationId xmlns:a16="http://schemas.microsoft.com/office/drawing/2014/main" id="{6D34278F-5266-545A-6245-8EB5A8D81947}"/>
+              </a:ext>
+            </a:extLst>
+          </p:cNvPr>
+          <p:cNvSpPr/>
+          <p:nvPr/>
+        </p:nvSpPr>
+        <p:spPr>
+          <a:xfrm>
+            <a:off x="3912189" y="7215898"/>
+            <a:ext cx="1008000" cy="1668599"/>
+          </a:xfrm>
+          <a:prstGeom prst="rect">
+            <a:avLst/>
+          </a:prstGeom>
+          <a:solidFill>
+            <a:schemeClr val="bg1">
+              <a:lumMod val="85000"/>
+              <a:alpha val="30000"/>
+            </a:schemeClr>
+          </a:solidFill>
+          <a:ln w="15240">
+            <a:solidFill>
+              <a:schemeClr val="tx1">
+                <a:lumMod val="65000"/>
+                <a:lumOff val="35000"/>
+              </a:schemeClr>
+            </a:solidFill>
+          </a:ln>
+        </p:spPr>
+        <p:style>
+          <a:lnRef idx="1">
+            <a:schemeClr val="accent1"/>
+          </a:lnRef>
+          <a:fillRef idx="3">
+            <a:schemeClr val="accent1"/>
+          </a:fillRef>
+          <a:effectRef idx="2">
+            <a:schemeClr val="accent1"/>
+          </a:effectRef>
+          <a:fontRef idx="minor">
+            <a:schemeClr val="lt1"/>
+          </a:fontRef>
+        </p:style>
+        <p:txBody>
+          <a:bodyPr rtlCol="0" anchor="ctr"/>
+          <a:lstStyle/>
+          <a:p>
+            <a:endParaRPr sz="900"/>
+          </a:p>
+        </p:txBody>
+      </p:sp>
+      <p:sp>
+        <p:nvSpPr>
+          <p:cNvPr id="138" name="TextBox 12">
+            <a:extLst>
+              <a:ext uri="{FF2B5EF4-FFF2-40B4-BE49-F238E27FC236}">
+                <a16:creationId xmlns:a16="http://schemas.microsoft.com/office/drawing/2014/main" id="{8ECB1F30-5FA8-FE1E-1ABB-4E05AA18C40F}"/>
+              </a:ext>
+            </a:extLst>
+          </p:cNvPr>
+          <p:cNvSpPr txBox="1"/>
+          <p:nvPr/>
+        </p:nvSpPr>
+        <p:spPr>
+          <a:xfrm>
+            <a:off x="1642500" y="6963293"/>
+            <a:ext cx="2079900" cy="230832"/>
+          </a:xfrm>
+          <a:prstGeom prst="rect">
+            <a:avLst/>
+          </a:prstGeom>
+          <a:noFill/>
+          <a:ln>
+            <a:noFill/>
+          </a:ln>
+        </p:spPr>
+        <p:txBody>
+          <a:bodyPr wrap="square">
+            <a:spAutoFit/>
+          </a:bodyPr>
+          <a:lstStyle/>
+          <a:p>
+            <a:pPr algn="l"/>
+            <a:r>
+              <a:rPr sz="900" b="1" dirty="0">
+                <a:solidFill>
+                  <a:srgbClr val="8282A0"/>
+                </a:solidFill>
+                <a:latin typeface="Calibri"/>
+              </a:rPr>
+              <a:t>PARALLEL TAXONOMIC COMPUTATION</a:t>
+            </a:r>
+          </a:p>
+        </p:txBody>
+      </p:sp>
+      <p:sp>
+        <p:nvSpPr>
+          <p:cNvPr id="139" name="Rounded Rectangle 32">
+            <a:extLst>
+              <a:ext uri="{FF2B5EF4-FFF2-40B4-BE49-F238E27FC236}">
+                <a16:creationId xmlns:a16="http://schemas.microsoft.com/office/drawing/2014/main" id="{364D1C6E-FBA7-34B5-55A9-C2EEAB440CFA}"/>
+              </a:ext>
+            </a:extLst>
+          </p:cNvPr>
+          <p:cNvSpPr/>
+          <p:nvPr/>
+        </p:nvSpPr>
+        <p:spPr>
+          <a:xfrm>
+            <a:off x="1663639" y="7260427"/>
+            <a:ext cx="900000" cy="1567004"/>
+          </a:xfrm>
+          <a:prstGeom prst="roundRect">
+            <a:avLst/>
+          </a:prstGeom>
+          <a:solidFill>
+            <a:schemeClr val="bg1">
+              <a:lumMod val="85000"/>
+            </a:schemeClr>
+          </a:solidFill>
+          <a:ln w="13970">
+            <a:solidFill>
+              <a:schemeClr val="tx1">
+                <a:lumMod val="65000"/>
+                <a:lumOff val="35000"/>
+              </a:schemeClr>
+            </a:solidFill>
+          </a:ln>
+        </p:spPr>
+        <p:style>
+          <a:lnRef idx="1">
+            <a:schemeClr val="accent1"/>
+          </a:lnRef>
+          <a:fillRef idx="3">
+            <a:schemeClr val="accent1"/>
+          </a:fillRef>
+          <a:effectRef idx="2">
+            <a:schemeClr val="accent1"/>
+          </a:effectRef>
+          <a:fontRef idx="minor">
+            <a:schemeClr val="lt1"/>
+          </a:fontRef>
+        </p:style>
+        <p:txBody>
+          <a:bodyPr wrap="square" lIns="21600" tIns="14400" rIns="21600" bIns="14400" rtlCol="0" anchor="ctr"/>
+          <a:lstStyle/>
+          <a:p>
+            <a:pPr algn="ctr">
+              <a:spcBef>
+                <a:spcPts val="0"/>
+              </a:spcBef>
+              <a:spcAft>
+                <a:spcPts val="0"/>
+              </a:spcAft>
+            </a:pPr>
+            <a:r>
+              <a:rPr lang="en-US" sz="900" b="1" i="0" dirty="0" err="1">
+                <a:solidFill>
+                  <a:srgbClr val="000000"/>
+                </a:solidFill>
+                <a:latin typeface="Calibri"/>
+              </a:rPr>
+              <a:t>Indepandent</a:t>
+            </a:r>
+            <a:r>
+              <a:rPr lang="en-US" sz="900" b="1" i="0" dirty="0">
+                <a:solidFill>
+                  <a:srgbClr val="000000"/>
+                </a:solidFill>
+                <a:latin typeface="Calibri"/>
+              </a:rPr>
+              <a:t> action</a:t>
+            </a:r>
+          </a:p>
+          <a:p>
+            <a:pPr algn="ctr">
+              <a:spcBef>
+                <a:spcPts val="0"/>
+              </a:spcBef>
+              <a:spcAft>
+                <a:spcPts val="0"/>
+              </a:spcAft>
+            </a:pPr>
+            <a:r>
+              <a:rPr lang="en-US" sz="900" dirty="0" err="1">
+                <a:solidFill>
+                  <a:srgbClr val="000000"/>
+                </a:solidFill>
+                <a:latin typeface="Calibri"/>
+              </a:rPr>
+              <a:t>E</a:t>
+            </a:r>
+            <a:r>
+              <a:rPr lang="en-US" sz="900" baseline="-25000" dirty="0" err="1">
+                <a:solidFill>
+                  <a:srgbClr val="000000"/>
+                </a:solidFill>
+                <a:latin typeface="Calibri"/>
+              </a:rPr>
+              <a:t>g,i</a:t>
+            </a:r>
+            <a:r>
+              <a:rPr lang="en-US" sz="900" dirty="0">
+                <a:solidFill>
+                  <a:srgbClr val="000000"/>
+                </a:solidFill>
+                <a:latin typeface="Calibri"/>
+              </a:rPr>
+              <a:t>=</a:t>
+            </a:r>
+            <a:r>
+              <a:rPr lang="en-US" sz="900" dirty="0" err="1">
+                <a:solidFill>
+                  <a:srgbClr val="000000"/>
+                </a:solidFill>
+                <a:latin typeface="Calibri"/>
+              </a:rPr>
+              <a:t>Tu</a:t>
+            </a:r>
+            <a:r>
+              <a:rPr lang="en-US" sz="900" baseline="-25000" dirty="0" err="1">
+                <a:solidFill>
+                  <a:srgbClr val="000000"/>
+                </a:solidFill>
+                <a:latin typeface="Calibri"/>
+              </a:rPr>
+              <a:t>g,I</a:t>
+            </a:r>
+            <a:r>
+              <a:rPr lang="en-US" sz="900" dirty="0">
+                <a:solidFill>
+                  <a:srgbClr val="000000"/>
+                </a:solidFill>
+                <a:latin typeface="Calibri"/>
+              </a:rPr>
+              <a:t> / </a:t>
+            </a:r>
+            <a:endParaRPr lang="en-US" sz="900" i="0" dirty="0">
+              <a:solidFill>
+                <a:srgbClr val="000000"/>
+              </a:solidFill>
+              <a:latin typeface="Calibri"/>
+            </a:endParaRPr>
+          </a:p>
+          <a:p>
+            <a:pPr algn="ctr">
+              <a:spcBef>
+                <a:spcPts val="0"/>
+              </a:spcBef>
+              <a:spcAft>
+                <a:spcPts val="0"/>
+              </a:spcAft>
+            </a:pPr>
+            <a:r>
+              <a:rPr lang="en-US" sz="900" b="0" i="0" dirty="0">
+                <a:solidFill>
+                  <a:srgbClr val="000000"/>
+                </a:solidFill>
+                <a:latin typeface="Calibri"/>
+              </a:rPr>
+              <a:t>(1 + </a:t>
+            </a:r>
+            <a:r>
+              <a:rPr lang="en-US" sz="900" dirty="0" err="1">
+                <a:solidFill>
+                  <a:srgbClr val="000000"/>
+                </a:solidFill>
+              </a:rPr>
+              <a:t>Tu</a:t>
+            </a:r>
+            <a:r>
+              <a:rPr lang="en-US" sz="900" baseline="-25000" dirty="0" err="1">
+                <a:solidFill>
+                  <a:srgbClr val="000000"/>
+                </a:solidFill>
+              </a:rPr>
+              <a:t>g,I</a:t>
+            </a:r>
+            <a:r>
+              <a:rPr lang="en-US" sz="900" dirty="0">
+                <a:solidFill>
+                  <a:srgbClr val="000000"/>
+                </a:solidFill>
+              </a:rPr>
+              <a:t>)</a:t>
+            </a:r>
+          </a:p>
+          <a:p>
+            <a:pPr algn="ctr">
+              <a:spcBef>
+                <a:spcPts val="0"/>
+              </a:spcBef>
+              <a:spcAft>
+                <a:spcPts val="0"/>
+              </a:spcAft>
+            </a:pPr>
+            <a:r>
+              <a:rPr lang="en-US" sz="900" b="0" i="0" dirty="0" err="1">
+                <a:solidFill>
+                  <a:srgbClr val="000000"/>
+                </a:solidFill>
+                <a:latin typeface="Calibri"/>
+              </a:rPr>
+              <a:t>E</a:t>
+            </a:r>
+            <a:r>
+              <a:rPr lang="en-US" sz="900" b="0" i="0" baseline="30000" dirty="0" err="1">
+                <a:solidFill>
+                  <a:srgbClr val="000000"/>
+                </a:solidFill>
+                <a:latin typeface="Calibri"/>
+              </a:rPr>
+              <a:t>mix</a:t>
+            </a:r>
+            <a:r>
+              <a:rPr lang="en-US" sz="900" b="0" i="0" dirty="0">
+                <a:solidFill>
+                  <a:srgbClr val="000000"/>
+                </a:solidFill>
+                <a:latin typeface="Calibri"/>
+              </a:rPr>
+              <a:t> = 1 – </a:t>
+            </a:r>
+            <a:r>
+              <a:rPr lang="el-GR" sz="900" b="0" i="0" dirty="0">
+                <a:solidFill>
+                  <a:srgbClr val="000000"/>
+                </a:solidFill>
+                <a:latin typeface="Calibri"/>
+              </a:rPr>
+              <a:t>Π</a:t>
+            </a:r>
+            <a:r>
+              <a:rPr lang="en-US" sz="900" b="0" i="0" dirty="0">
+                <a:solidFill>
+                  <a:srgbClr val="000000"/>
+                </a:solidFill>
+                <a:latin typeface="Calibri"/>
+              </a:rPr>
+              <a:t>(1-E</a:t>
+            </a:r>
+            <a:r>
+              <a:rPr lang="en-US" sz="900" b="0" i="0" baseline="-25000" dirty="0">
+                <a:solidFill>
+                  <a:srgbClr val="000000"/>
+                </a:solidFill>
+                <a:latin typeface="Calibri"/>
+              </a:rPr>
+              <a:t>g,i</a:t>
+            </a:r>
+            <a:r>
+              <a:rPr lang="en-US" sz="900" b="0" i="0" dirty="0">
+                <a:solidFill>
+                  <a:srgbClr val="000000"/>
+                </a:solidFill>
+                <a:latin typeface="Calibri"/>
+              </a:rPr>
+              <a:t>)</a:t>
+            </a:r>
+          </a:p>
+          <a:p>
+            <a:pPr algn="ctr">
+              <a:spcBef>
+                <a:spcPts val="0"/>
+              </a:spcBef>
+              <a:spcAft>
+                <a:spcPts val="0"/>
+              </a:spcAft>
+            </a:pPr>
+            <a:r>
+              <a:rPr lang="en-US" sz="900" dirty="0">
+                <a:solidFill>
+                  <a:srgbClr val="000000"/>
+                </a:solidFill>
+              </a:rPr>
+              <a:t>per compound, per station</a:t>
+            </a:r>
+          </a:p>
+          <a:p>
+            <a:pPr algn="ctr">
+              <a:spcBef>
+                <a:spcPts val="0"/>
+              </a:spcBef>
+              <a:spcAft>
+                <a:spcPts val="0"/>
+              </a:spcAft>
+            </a:pPr>
+            <a:r>
+              <a:rPr lang="en-US" sz="900" dirty="0">
+                <a:solidFill>
+                  <a:srgbClr val="000000"/>
+                </a:solidFill>
+              </a:rPr>
+              <a:t>per taxon</a:t>
+            </a:r>
+            <a:endParaRPr sz="900" b="0" i="0" dirty="0">
+              <a:solidFill>
+                <a:srgbClr val="000000"/>
+              </a:solidFill>
+              <a:latin typeface="Calibri"/>
+            </a:endParaRPr>
+          </a:p>
+        </p:txBody>
+      </p:sp>
+      <p:sp>
+        <p:nvSpPr>
+          <p:cNvPr id="141" name="Rounded Rectangle 34">
+            <a:extLst>
+              <a:ext uri="{FF2B5EF4-FFF2-40B4-BE49-F238E27FC236}">
+                <a16:creationId xmlns:a16="http://schemas.microsoft.com/office/drawing/2014/main" id="{716080F2-0F84-0CD3-BBB5-B51B975A5424}"/>
+              </a:ext>
+            </a:extLst>
+          </p:cNvPr>
+          <p:cNvSpPr/>
+          <p:nvPr/>
+        </p:nvSpPr>
+        <p:spPr>
+          <a:xfrm>
+            <a:off x="2803579" y="7252806"/>
+            <a:ext cx="900000" cy="1571521"/>
+          </a:xfrm>
+          <a:prstGeom prst="roundRect">
+            <a:avLst/>
+          </a:prstGeom>
+          <a:solidFill>
+            <a:schemeClr val="bg1">
+              <a:lumMod val="85000"/>
+            </a:schemeClr>
+          </a:solidFill>
+          <a:ln w="13970">
+            <a:solidFill>
+              <a:schemeClr val="tx1">
+                <a:lumMod val="65000"/>
+                <a:lumOff val="35000"/>
+              </a:schemeClr>
+            </a:solidFill>
+          </a:ln>
+        </p:spPr>
+        <p:style>
+          <a:lnRef idx="1">
+            <a:schemeClr val="accent1"/>
+          </a:lnRef>
+          <a:fillRef idx="3">
+            <a:schemeClr val="accent1"/>
+          </a:fillRef>
+          <a:effectRef idx="2">
+            <a:schemeClr val="accent1"/>
+          </a:effectRef>
+          <a:fontRef idx="minor">
+            <a:schemeClr val="lt1"/>
+          </a:fontRef>
+        </p:style>
+        <p:txBody>
+          <a:bodyPr wrap="square" lIns="21600" tIns="14400" rIns="21600" bIns="14400" rtlCol="0" anchor="ctr"/>
+          <a:lstStyle/>
+          <a:p>
+            <a:pPr algn="ctr">
+              <a:spcBef>
+                <a:spcPts val="0"/>
+              </a:spcBef>
+              <a:spcAft>
+                <a:spcPts val="0"/>
+              </a:spcAft>
+            </a:pPr>
+            <a:r>
+              <a:rPr lang="en-US" sz="900" b="1" dirty="0">
+                <a:solidFill>
+                  <a:srgbClr val="000000"/>
+                </a:solidFill>
+              </a:rPr>
+              <a:t>Benchmark based </a:t>
+            </a:r>
+          </a:p>
+          <a:p>
+            <a:pPr algn="ctr">
+              <a:spcBef>
+                <a:spcPts val="0"/>
+              </a:spcBef>
+              <a:spcAft>
+                <a:spcPts val="0"/>
+              </a:spcAft>
+            </a:pPr>
+            <a:r>
+              <a:rPr lang="en-US" sz="900" dirty="0">
+                <a:solidFill>
+                  <a:srgbClr val="000000"/>
+                </a:solidFill>
+              </a:rPr>
+              <a:t>TU + PTI</a:t>
+            </a:r>
+          </a:p>
+          <a:p>
+            <a:pPr algn="ctr">
+              <a:spcBef>
+                <a:spcPts val="0"/>
+              </a:spcBef>
+              <a:spcAft>
+                <a:spcPts val="0"/>
+              </a:spcAft>
+            </a:pPr>
+            <a:r>
+              <a:rPr lang="en-US" sz="900" dirty="0">
+                <a:solidFill>
+                  <a:srgbClr val="000000"/>
+                </a:solidFill>
+              </a:rPr>
+              <a:t>TUᵢⱼ = Cᵢⱼ / benchmark</a:t>
+            </a:r>
+          </a:p>
+          <a:p>
+            <a:pPr algn="ctr">
+              <a:spcBef>
+                <a:spcPts val="0"/>
+              </a:spcBef>
+              <a:spcAft>
+                <a:spcPts val="0"/>
+              </a:spcAft>
+            </a:pPr>
+            <a:endParaRPr lang="en-US" sz="900" dirty="0">
+              <a:solidFill>
+                <a:srgbClr val="000000"/>
+              </a:solidFill>
+            </a:endParaRPr>
+          </a:p>
+          <a:p>
+            <a:pPr algn="ctr">
+              <a:spcBef>
+                <a:spcPts val="0"/>
+              </a:spcBef>
+              <a:spcAft>
+                <a:spcPts val="0"/>
+              </a:spcAft>
+            </a:pPr>
+            <a:r>
+              <a:rPr lang="en-US" sz="900" dirty="0">
+                <a:solidFill>
+                  <a:srgbClr val="000000"/>
+                </a:solidFill>
+              </a:rPr>
+              <a:t>per compound, per station</a:t>
+            </a:r>
+          </a:p>
+          <a:p>
+            <a:pPr algn="ctr">
+              <a:spcBef>
+                <a:spcPts val="0"/>
+              </a:spcBef>
+              <a:spcAft>
+                <a:spcPts val="0"/>
+              </a:spcAft>
+            </a:pPr>
+            <a:r>
+              <a:rPr lang="en-US" sz="900" dirty="0">
+                <a:solidFill>
+                  <a:srgbClr val="000000"/>
+                </a:solidFill>
+              </a:rPr>
+              <a:t>per taxon</a:t>
+            </a:r>
+          </a:p>
+          <a:p>
+            <a:pPr algn="ctr">
+              <a:spcBef>
+                <a:spcPts val="0"/>
+              </a:spcBef>
+              <a:spcAft>
+                <a:spcPts val="0"/>
+              </a:spcAft>
+            </a:pPr>
+            <a:endParaRPr lang="en-US" sz="900" dirty="0">
+              <a:solidFill>
+                <a:srgbClr val="000000"/>
+              </a:solidFill>
+            </a:endParaRPr>
+          </a:p>
+        </p:txBody>
+      </p:sp>
+      <p:sp>
+        <p:nvSpPr>
+          <p:cNvPr id="143" name="Rounded Rectangle 36">
+            <a:extLst>
+              <a:ext uri="{FF2B5EF4-FFF2-40B4-BE49-F238E27FC236}">
+                <a16:creationId xmlns:a16="http://schemas.microsoft.com/office/drawing/2014/main" id="{E6F8B948-E575-532A-5637-01B32E13AC38}"/>
+              </a:ext>
+            </a:extLst>
+          </p:cNvPr>
+          <p:cNvSpPr/>
+          <p:nvPr/>
+        </p:nvSpPr>
+        <p:spPr>
+          <a:xfrm>
+            <a:off x="3966379" y="7268046"/>
+            <a:ext cx="900000" cy="1571521"/>
+          </a:xfrm>
+          <a:prstGeom prst="roundRect">
+            <a:avLst/>
+          </a:prstGeom>
+          <a:solidFill>
+            <a:schemeClr val="bg1">
+              <a:lumMod val="85000"/>
+            </a:schemeClr>
+          </a:solidFill>
+          <a:ln w="13970">
+            <a:solidFill>
+              <a:schemeClr val="tx1">
+                <a:lumMod val="65000"/>
+                <a:lumOff val="35000"/>
+              </a:schemeClr>
+            </a:solidFill>
+          </a:ln>
+        </p:spPr>
+        <p:style>
+          <a:lnRef idx="1">
+            <a:schemeClr val="accent1"/>
+          </a:lnRef>
+          <a:fillRef idx="3">
+            <a:schemeClr val="accent1"/>
+          </a:fillRef>
+          <a:effectRef idx="2">
+            <a:schemeClr val="accent1"/>
+          </a:effectRef>
+          <a:fontRef idx="minor">
+            <a:schemeClr val="lt1"/>
+          </a:fontRef>
+        </p:style>
+        <p:txBody>
+          <a:bodyPr wrap="square" lIns="21600" tIns="14400" rIns="21600" bIns="14400" rtlCol="0" anchor="ctr"/>
+          <a:lstStyle/>
+          <a:p>
+            <a:pPr algn="ctr">
+              <a:spcBef>
+                <a:spcPts val="0"/>
+              </a:spcBef>
+              <a:spcAft>
+                <a:spcPts val="0"/>
+              </a:spcAft>
+            </a:pPr>
+            <a:r>
+              <a:rPr lang="en-US" sz="900" b="1" i="0" dirty="0">
+                <a:solidFill>
+                  <a:srgbClr val="000000"/>
+                </a:solidFill>
+                <a:latin typeface="Calibri"/>
+              </a:rPr>
+              <a:t>HC</a:t>
+            </a:r>
+            <a:r>
+              <a:rPr lang="en-US" sz="900" b="1" i="0" baseline="-25000" dirty="0">
+                <a:solidFill>
+                  <a:srgbClr val="000000"/>
+                </a:solidFill>
+                <a:latin typeface="Calibri"/>
+              </a:rPr>
+              <a:t>5</a:t>
+            </a:r>
+            <a:r>
+              <a:rPr lang="en-US" sz="900" b="1" i="0" dirty="0">
+                <a:solidFill>
+                  <a:srgbClr val="000000"/>
+                </a:solidFill>
+                <a:latin typeface="Calibri"/>
+              </a:rPr>
+              <a:t> based </a:t>
+            </a:r>
+          </a:p>
+          <a:p>
+            <a:pPr algn="ctr">
+              <a:spcBef>
+                <a:spcPts val="0"/>
+              </a:spcBef>
+              <a:spcAft>
+                <a:spcPts val="0"/>
+              </a:spcAft>
+            </a:pPr>
+            <a:r>
+              <a:rPr lang="en-US" sz="900" b="1" dirty="0">
+                <a:solidFill>
+                  <a:srgbClr val="000000"/>
+                </a:solidFill>
+                <a:latin typeface="Calibri"/>
+              </a:rPr>
+              <a:t>TU + PTI</a:t>
+            </a:r>
+          </a:p>
+          <a:p>
+            <a:pPr algn="ctr">
+              <a:spcBef>
+                <a:spcPts val="0"/>
+              </a:spcBef>
+              <a:spcAft>
+                <a:spcPts val="0"/>
+              </a:spcAft>
+            </a:pPr>
+            <a:r>
+              <a:rPr lang="en-US" sz="900" dirty="0">
+                <a:solidFill>
+                  <a:srgbClr val="000000"/>
+                </a:solidFill>
+              </a:rPr>
+              <a:t>TUᵢⱼ = Cᵢⱼ / HC₅,ᵢ</a:t>
+            </a:r>
+          </a:p>
+          <a:p>
+            <a:pPr algn="ctr">
+              <a:spcBef>
+                <a:spcPts val="0"/>
+              </a:spcBef>
+              <a:spcAft>
+                <a:spcPts val="0"/>
+              </a:spcAft>
+            </a:pPr>
+            <a:r>
+              <a:rPr lang="en-US" sz="900" dirty="0">
+                <a:solidFill>
+                  <a:srgbClr val="000000"/>
+                </a:solidFill>
+              </a:rPr>
+              <a:t>per compound, per station</a:t>
+            </a:r>
+          </a:p>
+          <a:p>
+            <a:pPr algn="ctr">
+              <a:spcBef>
+                <a:spcPts val="0"/>
+              </a:spcBef>
+              <a:spcAft>
+                <a:spcPts val="0"/>
+              </a:spcAft>
+            </a:pPr>
+            <a:r>
+              <a:rPr lang="en-US" sz="900" dirty="0">
+                <a:solidFill>
+                  <a:srgbClr val="000000"/>
+                </a:solidFill>
+              </a:rPr>
+              <a:t>per taxon</a:t>
+            </a:r>
+            <a:endParaRPr lang="en-US" sz="900" dirty="0">
+              <a:solidFill>
+                <a:srgbClr val="000000"/>
+              </a:solidFill>
+              <a:latin typeface="Calibri"/>
+            </a:endParaRPr>
+          </a:p>
+          <a:p>
+            <a:pPr algn="ctr">
+              <a:spcBef>
+                <a:spcPts val="0"/>
+              </a:spcBef>
+              <a:spcAft>
+                <a:spcPts val="0"/>
+              </a:spcAft>
+            </a:pPr>
+            <a:endParaRPr sz="900" b="0" i="0" dirty="0">
+              <a:solidFill>
+                <a:srgbClr val="000000"/>
+              </a:solidFill>
+              <a:latin typeface="Calibri"/>
+            </a:endParaRPr>
+          </a:p>
+        </p:txBody>
+      </p:sp>
+      <p:sp>
+        <p:nvSpPr>
+          <p:cNvPr id="148" name="Rectangle 6">
+            <a:extLst>
+              <a:ext uri="{FF2B5EF4-FFF2-40B4-BE49-F238E27FC236}">
+                <a16:creationId xmlns:a16="http://schemas.microsoft.com/office/drawing/2014/main" id="{846F65D3-C2ED-3009-18CD-41831C7B0003}"/>
+              </a:ext>
+            </a:extLst>
+          </p:cNvPr>
+          <p:cNvSpPr/>
+          <p:nvPr/>
+        </p:nvSpPr>
+        <p:spPr>
+          <a:xfrm>
+            <a:off x="458829" y="7215898"/>
+            <a:ext cx="1008000" cy="1668599"/>
+          </a:xfrm>
+          <a:prstGeom prst="rect">
+            <a:avLst/>
+          </a:prstGeom>
+          <a:solidFill>
+            <a:schemeClr val="bg1">
+              <a:lumMod val="85000"/>
+              <a:alpha val="30000"/>
+            </a:schemeClr>
+          </a:solidFill>
+          <a:ln w="15240">
+            <a:solidFill>
+              <a:schemeClr val="tx1">
+                <a:lumMod val="65000"/>
+                <a:lumOff val="35000"/>
+              </a:schemeClr>
+            </a:solidFill>
+          </a:ln>
+        </p:spPr>
+        <p:style>
+          <a:lnRef idx="1">
+            <a:schemeClr val="accent1"/>
+          </a:lnRef>
+          <a:fillRef idx="3">
+            <a:schemeClr val="accent1"/>
+          </a:fillRef>
+          <a:effectRef idx="2">
+            <a:schemeClr val="accent1"/>
+          </a:effectRef>
+          <a:fontRef idx="minor">
+            <a:schemeClr val="lt1"/>
+          </a:fontRef>
+        </p:style>
+        <p:txBody>
+          <a:bodyPr rtlCol="0" anchor="ctr"/>
+          <a:lstStyle/>
+          <a:p>
+            <a:endParaRPr sz="900"/>
+          </a:p>
+        </p:txBody>
+      </p:sp>
+      <p:sp>
+        <p:nvSpPr>
+          <p:cNvPr id="149" name="Rounded Rectangle 32">
+            <a:extLst>
+              <a:ext uri="{FF2B5EF4-FFF2-40B4-BE49-F238E27FC236}">
+                <a16:creationId xmlns:a16="http://schemas.microsoft.com/office/drawing/2014/main" id="{076AAEBD-6212-739E-B802-387BD231E162}"/>
+              </a:ext>
+            </a:extLst>
+          </p:cNvPr>
+          <p:cNvSpPr/>
+          <p:nvPr/>
+        </p:nvSpPr>
+        <p:spPr>
+          <a:xfrm>
+            <a:off x="513019" y="7260427"/>
+            <a:ext cx="900000" cy="1567004"/>
+          </a:xfrm>
+          <a:prstGeom prst="roundRect">
+            <a:avLst/>
+          </a:prstGeom>
+          <a:solidFill>
+            <a:schemeClr val="bg1">
+              <a:lumMod val="85000"/>
+            </a:schemeClr>
+          </a:solidFill>
+          <a:ln w="13970">
+            <a:solidFill>
+              <a:schemeClr val="tx1">
+                <a:lumMod val="65000"/>
+                <a:lumOff val="35000"/>
+              </a:schemeClr>
+            </a:solidFill>
+          </a:ln>
+        </p:spPr>
+        <p:style>
+          <a:lnRef idx="1">
+            <a:schemeClr val="accent1"/>
+          </a:lnRef>
+          <a:fillRef idx="3">
+            <a:schemeClr val="accent1"/>
+          </a:fillRef>
+          <a:effectRef idx="2">
+            <a:schemeClr val="accent1"/>
+          </a:effectRef>
+          <a:fontRef idx="minor">
+            <a:schemeClr val="lt1"/>
+          </a:fontRef>
+        </p:style>
+        <p:txBody>
+          <a:bodyPr wrap="square" lIns="21600" tIns="14400" rIns="21600" bIns="14400" rtlCol="0" anchor="ctr"/>
+          <a:lstStyle/>
+          <a:p>
+            <a:pPr algn="ctr">
+              <a:spcBef>
+                <a:spcPts val="0"/>
+              </a:spcBef>
+              <a:spcAft>
+                <a:spcPts val="0"/>
+              </a:spcAft>
+            </a:pPr>
+            <a:r>
+              <a:rPr lang="en-US" sz="900" b="1" i="0" dirty="0">
+                <a:solidFill>
+                  <a:srgbClr val="000000"/>
+                </a:solidFill>
+                <a:latin typeface="Calibri"/>
+              </a:rPr>
+              <a:t>Concentration addition + Mode action</a:t>
+            </a:r>
+          </a:p>
+          <a:p>
+            <a:r>
+              <a:rPr lang="en-US" sz="900" dirty="0">
+                <a:solidFill>
+                  <a:srgbClr val="000000"/>
+                </a:solidFill>
+              </a:rPr>
+              <a:t>Concentration Addition per group + the group-level Independent Action</a:t>
+            </a:r>
+          </a:p>
+          <a:p>
+            <a:r>
+              <a:rPr lang="en-US" sz="900" dirty="0">
+                <a:solidFill>
+                  <a:srgbClr val="000000"/>
+                </a:solidFill>
+              </a:rPr>
+              <a:t>Effect calculation</a:t>
+            </a:r>
+            <a:endParaRPr sz="900" i="0" dirty="0">
+              <a:solidFill>
+                <a:srgbClr val="000000"/>
+              </a:solidFill>
+              <a:latin typeface="Calibri"/>
+            </a:endParaRPr>
+          </a:p>
+        </p:txBody>
+      </p:sp>
+      <p:sp>
+        <p:nvSpPr>
+          <p:cNvPr id="150" name="חץ: למטה 149">
+            <a:extLst>
+              <a:ext uri="{FF2B5EF4-FFF2-40B4-BE49-F238E27FC236}">
+                <a16:creationId xmlns:a16="http://schemas.microsoft.com/office/drawing/2014/main" id="{FE0AD6F9-5097-44AD-4349-505106E7A189}"/>
+              </a:ext>
+            </a:extLst>
+          </p:cNvPr>
+          <p:cNvSpPr/>
+          <p:nvPr/>
+        </p:nvSpPr>
+        <p:spPr>
+          <a:xfrm>
+            <a:off x="4339045" y="8962019"/>
+            <a:ext cx="360455" cy="172500"/>
           </a:xfrm>
           <a:prstGeom prst="downArrow">
             <a:avLst/>
